--- a/slides/NSGA-II_Static_Optimizer.pptx
+++ b/slides/NSGA-II_Static_Optimizer.pptx
@@ -5,16 +5,15 @@
     <p:sldMasterId id="2147483648" r:id="rId1"/>
   </p:sldMasterIdLst>
   <p:notesMasterIdLst>
-    <p:notesMasterId r:id="rId9"/>
+    <p:notesMasterId r:id="rId8"/>
   </p:notesMasterIdLst>
   <p:sldIdLst>
     <p:sldId id="262" r:id="rId2"/>
-    <p:sldId id="256" r:id="rId3"/>
-    <p:sldId id="257" r:id="rId4"/>
-    <p:sldId id="258" r:id="rId5"/>
-    <p:sldId id="259" r:id="rId6"/>
-    <p:sldId id="260" r:id="rId7"/>
-    <p:sldId id="261" r:id="rId8"/>
+    <p:sldId id="257" r:id="rId3"/>
+    <p:sldId id="258" r:id="rId4"/>
+    <p:sldId id="259" r:id="rId5"/>
+    <p:sldId id="260" r:id="rId6"/>
+    <p:sldId id="261" r:id="rId7"/>
   </p:sldIdLst>
   <p:sldSz cx="12192000" cy="6858000"/>
   <p:notesSz cx="6858000" cy="9144000"/>
@@ -113,6 +112,11 @@
       </a:defRPr>
     </a:lvl9pPr>
   </p:defaultTextStyle>
+  <p:extLst>
+    <p:ext uri="{EFAFB233-063F-42B5-8137-9DF3F51BA10A}">
+      <p15:sldGuideLst xmlns:p15="http://schemas.microsoft.com/office/powerpoint/2012/main"/>
+    </p:ext>
+  </p:extLst>
 </p:presentation>
 </file>
 
@@ -198,7 +202,7 @@
           <a:p>
             <a:fld id="{68A8A259-EC5C-486F-8E25-9A7145B17D36}" type="datetimeFigureOut">
               <a:rPr lang="en-US" smtClean="0"/>
-              <a:t>4/24/2026</a:t>
+              <a:t>5/7/2026</a:t>
             </a:fld>
             <a:endParaRPr lang="en-US"/>
           </a:p>
@@ -537,98 +541,7 @@
           <a:p>
             <a:fld id="{7C084B5D-137E-4885-9181-B35E089F35DE}" type="slidenum">
               <a:rPr lang="en-US" smtClean="0"/>
-              <a:t>2</a:t>
-            </a:fld>
-            <a:endParaRPr lang="en-US"/>
-          </a:p>
-        </p:txBody>
-      </p:sp>
-    </p:spTree>
-    <p:extLst>
-      <p:ext uri="{BB962C8B-B14F-4D97-AF65-F5344CB8AC3E}">
-        <p14:creationId xmlns:p14="http://schemas.microsoft.com/office/powerpoint/2010/main" val="405421358"/>
-      </p:ext>
-    </p:extLst>
-  </p:cSld>
-  <p:clrMapOvr>
-    <a:masterClrMapping/>
-  </p:clrMapOvr>
-</p:notes>
-</file>
-
-<file path=ppt/notesSlides/notesSlide2.xml><?xml version="1.0" encoding="utf-8"?>
-<p:notes xmlns:a="http://schemas.openxmlformats.org/drawingml/2006/main" xmlns:r="http://schemas.openxmlformats.org/officeDocument/2006/relationships" xmlns:p="http://schemas.openxmlformats.org/presentationml/2006/main">
-  <p:cSld>
-    <p:spTree>
-      <p:nvGrpSpPr>
-        <p:cNvPr id="1" name=""/>
-        <p:cNvGrpSpPr/>
-        <p:nvPr/>
-      </p:nvGrpSpPr>
-      <p:grpSpPr>
-        <a:xfrm>
-          <a:off x="0" y="0"/>
-          <a:ext cx="0" cy="0"/>
-          <a:chOff x="0" y="0"/>
-          <a:chExt cx="0" cy="0"/>
-        </a:xfrm>
-      </p:grpSpPr>
-      <p:sp>
-        <p:nvSpPr>
-          <p:cNvPr id="2" name="Slide Image Placeholder 1"/>
-          <p:cNvSpPr>
-            <a:spLocks noGrp="1" noRot="1" noChangeAspect="1"/>
-          </p:cNvSpPr>
-          <p:nvPr>
-            <p:ph type="sldImg"/>
-          </p:nvPr>
-        </p:nvSpPr>
-        <p:spPr/>
-        <p:txBody>
-          <a:bodyPr/>
-          <a:lstStyle/>
-          <a:p>
-            <a:endParaRPr lang="en-US"/>
-          </a:p>
-        </p:txBody>
-      </p:sp>
-      <p:sp>
-        <p:nvSpPr>
-          <p:cNvPr id="3" name="Notes Placeholder 2"/>
-          <p:cNvSpPr>
-            <a:spLocks noGrp="1"/>
-          </p:cNvSpPr>
-          <p:nvPr>
-            <p:ph type="body" idx="1"/>
-          </p:nvPr>
-        </p:nvSpPr>
-        <p:spPr/>
-        <p:txBody>
-          <a:bodyPr/>
-          <a:lstStyle/>
-          <a:p>
-            <a:endParaRPr lang="en-US" dirty="0"/>
-          </a:p>
-        </p:txBody>
-      </p:sp>
-      <p:sp>
-        <p:nvSpPr>
-          <p:cNvPr id="4" name="Slide Number Placeholder 3"/>
-          <p:cNvSpPr>
-            <a:spLocks noGrp="1"/>
-          </p:cNvSpPr>
-          <p:nvPr>
-            <p:ph type="sldNum" sz="quarter" idx="5"/>
-          </p:nvPr>
-        </p:nvSpPr>
-        <p:spPr/>
-        <p:txBody>
-          <a:bodyPr/>
-          <a:lstStyle/>
-          <a:p>
-            <a:fld id="{7C084B5D-137E-4885-9181-B35E089F35DE}" type="slidenum">
-              <a:rPr lang="en-US" smtClean="0"/>
-              <a:t>4</a:t>
+              <a:t>3</a:t>
             </a:fld>
             <a:endParaRPr lang="en-US"/>
           </a:p>
@@ -794,7 +707,7 @@
           <a:p>
             <a:fld id="{473181B7-F75B-4CAC-910F-B825BC47056C}" type="datetime1">
               <a:rPr lang="en-US" smtClean="0"/>
-              <a:t>4/24/2026</a:t>
+              <a:t>5/7/2026</a:t>
             </a:fld>
             <a:endParaRPr lang="en-US"/>
           </a:p>
@@ -992,7 +905,7 @@
           <a:p>
             <a:fld id="{9D978E73-191B-4B89-9848-0B7D314020B6}" type="datetime1">
               <a:rPr lang="en-US" smtClean="0"/>
-              <a:t>4/24/2026</a:t>
+              <a:t>5/7/2026</a:t>
             </a:fld>
             <a:endParaRPr lang="en-US"/>
           </a:p>
@@ -1200,7 +1113,7 @@
           <a:p>
             <a:fld id="{7156131E-0066-4490-9B2D-BA13FDF09EE7}" type="datetime1">
               <a:rPr lang="en-US" smtClean="0"/>
-              <a:t>4/24/2026</a:t>
+              <a:t>5/7/2026</a:t>
             </a:fld>
             <a:endParaRPr lang="en-US"/>
           </a:p>
@@ -1398,7 +1311,7 @@
           <a:p>
             <a:fld id="{D15D9B5B-CA09-42CB-83E9-BBBFD42ED5F0}" type="datetime1">
               <a:rPr lang="en-US" smtClean="0"/>
-              <a:t>4/24/2026</a:t>
+              <a:t>5/7/2026</a:t>
             </a:fld>
             <a:endParaRPr lang="en-US"/>
           </a:p>
@@ -1673,7 +1586,7 @@
           <a:p>
             <a:fld id="{954EE328-8190-4917-B253-C41479A4C94E}" type="datetime1">
               <a:rPr lang="en-US" smtClean="0"/>
-              <a:t>4/24/2026</a:t>
+              <a:t>5/7/2026</a:t>
             </a:fld>
             <a:endParaRPr lang="en-US"/>
           </a:p>
@@ -1938,7 +1851,7 @@
           <a:p>
             <a:fld id="{57781B23-06A0-4217-9ACE-3776A71895D9}" type="datetime1">
               <a:rPr lang="en-US" smtClean="0"/>
-              <a:t>4/24/2026</a:t>
+              <a:t>5/7/2026</a:t>
             </a:fld>
             <a:endParaRPr lang="en-US"/>
           </a:p>
@@ -2350,7 +2263,7 @@
           <a:p>
             <a:fld id="{45324569-0034-4FF7-9171-BCAFBDFA9C15}" type="datetime1">
               <a:rPr lang="en-US" smtClean="0"/>
-              <a:t>4/24/2026</a:t>
+              <a:t>5/7/2026</a:t>
             </a:fld>
             <a:endParaRPr lang="en-US"/>
           </a:p>
@@ -2491,7 +2404,7 @@
           <a:p>
             <a:fld id="{0BD5D85F-DE8E-4A97-AB1E-4602C448F99D}" type="datetime1">
               <a:rPr lang="en-US" smtClean="0"/>
-              <a:t>4/24/2026</a:t>
+              <a:t>5/7/2026</a:t>
             </a:fld>
             <a:endParaRPr lang="en-US"/>
           </a:p>
@@ -2604,7 +2517,7 @@
           <a:p>
             <a:fld id="{C6E2ED3B-7404-42DF-BCD9-1F3D4B6539AD}" type="datetime1">
               <a:rPr lang="en-US" smtClean="0"/>
-              <a:t>4/24/2026</a:t>
+              <a:t>5/7/2026</a:t>
             </a:fld>
             <a:endParaRPr lang="en-US"/>
           </a:p>
@@ -2915,7 +2828,7 @@
           <a:p>
             <a:fld id="{950DA05B-F832-4EBA-9D1C-89D893943A8C}" type="datetime1">
               <a:rPr lang="en-US" smtClean="0"/>
-              <a:t>4/24/2026</a:t>
+              <a:t>5/7/2026</a:t>
             </a:fld>
             <a:endParaRPr lang="en-US"/>
           </a:p>
@@ -3203,7 +3116,7 @@
           <a:p>
             <a:fld id="{E6EE1073-9904-45D5-8D36-9A7A2DCD4ECD}" type="datetime1">
               <a:rPr lang="en-US" smtClean="0"/>
-              <a:t>4/24/2026</a:t>
+              <a:t>5/7/2026</a:t>
             </a:fld>
             <a:endParaRPr lang="en-US"/>
           </a:p>
@@ -3444,7 +3357,7 @@
           <a:p>
             <a:fld id="{34A07FC7-4E78-4155-AEE4-1AE0FFA41734}" type="datetime1">
               <a:rPr lang="en-US" smtClean="0"/>
-              <a:t>4/24/2026</a:t>
+              <a:t>5/7/2026</a:t>
             </a:fld>
             <a:endParaRPr lang="en-US"/>
           </a:p>
@@ -4158,1495 +4071,6 @@
           <p:cNvPr id="2" name="TextBox 1">
             <a:extLst>
               <a:ext uri="{FF2B5EF4-FFF2-40B4-BE49-F238E27FC236}">
-                <a16:creationId xmlns:a16="http://schemas.microsoft.com/office/drawing/2014/main" id="{5087CD6E-5B0A-9236-54DB-AD6211D98C1E}"/>
-              </a:ext>
-            </a:extLst>
-          </p:cNvPr>
-          <p:cNvSpPr txBox="1"/>
-          <p:nvPr/>
-        </p:nvSpPr>
-        <p:spPr>
-          <a:xfrm>
-            <a:off x="2307771" y="1025538"/>
-            <a:ext cx="11176000" cy="553998"/>
-          </a:xfrm>
-          <a:prstGeom prst="rect">
-            <a:avLst/>
-          </a:prstGeom>
-          <a:noFill/>
-        </p:spPr>
-        <p:txBody>
-          <a:bodyPr vert="horz" rtlCol="0">
-            <a:spAutoFit/>
-          </a:bodyPr>
-          <a:lstStyle/>
-          <a:p>
-            <a:r>
-              <a:rPr lang="en-US" sz="3000" b="1" dirty="0"/>
-              <a:t>Best Resources by Slice</a:t>
-            </a:r>
-          </a:p>
-        </p:txBody>
-      </p:sp>
-      <p:graphicFrame>
-        <p:nvGraphicFramePr>
-          <p:cNvPr id="3" name="Table 2">
-            <a:extLst>
-              <a:ext uri="{FF2B5EF4-FFF2-40B4-BE49-F238E27FC236}">
-                <a16:creationId xmlns:a16="http://schemas.microsoft.com/office/drawing/2014/main" id="{0F35D904-77FF-7EBC-2441-5961630610F8}"/>
-              </a:ext>
-            </a:extLst>
-          </p:cNvPr>
-          <p:cNvGraphicFramePr>
-            <a:graphicFrameLocks noGrp="1"/>
-          </p:cNvGraphicFramePr>
-          <p:nvPr>
-            <p:extLst>
-              <p:ext uri="{D42A27DB-BD31-4B8C-83A1-F6EECF244321}">
-                <p14:modId xmlns:p14="http://schemas.microsoft.com/office/powerpoint/2010/main" val="2017783355"/>
-              </p:ext>
-            </p:extLst>
-          </p:nvPr>
-        </p:nvGraphicFramePr>
-        <p:xfrm>
-          <a:off x="2307771" y="1856538"/>
-          <a:ext cx="8133805" cy="3698925"/>
-        </p:xfrm>
-        <a:graphic>
-          <a:graphicData uri="http://schemas.openxmlformats.org/drawingml/2006/table">
-            <a:tbl>
-              <a:tblPr firstRow="1" bandRow="1">
-                <a:effectLst>
-                  <a:outerShdw blurRad="50800" dist="38100" dir="16200000" rotWithShape="0">
-                    <a:prstClr val="black">
-                      <a:alpha val="40000"/>
-                    </a:prstClr>
-                  </a:outerShdw>
-                </a:effectLst>
-                <a:tableStyleId>{5C22544A-7EE6-4342-B048-85BDC9FD1C3A}</a:tableStyleId>
-              </a:tblPr>
-              <a:tblGrid>
-                <a:gridCol w="1559593">
-                  <a:extLst>
-                    <a:ext uri="{9D8B030D-6E8A-4147-A177-3AD203B41FA5}">
-                      <a16:colId xmlns:a16="http://schemas.microsoft.com/office/drawing/2014/main" val="260843878"/>
-                    </a:ext>
-                  </a:extLst>
-                </a:gridCol>
-                <a:gridCol w="1643553">
-                  <a:extLst>
-                    <a:ext uri="{9D8B030D-6E8A-4147-A177-3AD203B41FA5}">
-                      <a16:colId xmlns:a16="http://schemas.microsoft.com/office/drawing/2014/main" val="2725887175"/>
-                    </a:ext>
-                  </a:extLst>
-                </a:gridCol>
-                <a:gridCol w="1643553">
-                  <a:extLst>
-                    <a:ext uri="{9D8B030D-6E8A-4147-A177-3AD203B41FA5}">
-                      <a16:colId xmlns:a16="http://schemas.microsoft.com/office/drawing/2014/main" val="2024139962"/>
-                    </a:ext>
-                  </a:extLst>
-                </a:gridCol>
-                <a:gridCol w="1643553">
-                  <a:extLst>
-                    <a:ext uri="{9D8B030D-6E8A-4147-A177-3AD203B41FA5}">
-                      <a16:colId xmlns:a16="http://schemas.microsoft.com/office/drawing/2014/main" val="3087540697"/>
-                    </a:ext>
-                  </a:extLst>
-                </a:gridCol>
-                <a:gridCol w="1643553">
-                  <a:extLst>
-                    <a:ext uri="{9D8B030D-6E8A-4147-A177-3AD203B41FA5}">
-                      <a16:colId xmlns:a16="http://schemas.microsoft.com/office/drawing/2014/main" val="3083775556"/>
-                    </a:ext>
-                  </a:extLst>
-                </a:gridCol>
-              </a:tblGrid>
-              <a:tr h="739785">
-                <a:tc>
-                  <a:txBody>
-                    <a:bodyPr/>
-                    <a:lstStyle/>
-                    <a:p>
-                      <a:r>
-                        <a:rPr lang="en-US" sz="1400" b="1" dirty="0"/>
-                        <a:t>Slice</a:t>
-                      </a:r>
-                    </a:p>
-                  </a:txBody>
-                  <a:tcPr>
-                    <a:lnL w="12700" cmpd="sng">
-                      <a:noFill/>
-                    </a:lnL>
-                    <a:lnR w="12700" cmpd="sng">
-                      <a:noFill/>
-                    </a:lnR>
-                    <a:lnT w="12700" cmpd="sng">
-                      <a:noFill/>
-                    </a:lnT>
-                    <a:lnB w="12700" cap="flat" cmpd="sng" algn="ctr">
-                      <a:solidFill>
-                        <a:schemeClr val="tx1"/>
-                      </a:solidFill>
-                      <a:prstDash val="solid"/>
-                      <a:round/>
-                      <a:headEnd type="none" w="med" len="med"/>
-                      <a:tailEnd type="none" w="med" len="med"/>
-                    </a:lnB>
-                    <a:lnTlToBr w="12700" cmpd="sng">
-                      <a:noFill/>
-                      <a:prstDash val="solid"/>
-                    </a:lnTlToBr>
-                    <a:lnBlToTr w="12700" cmpd="sng">
-                      <a:noFill/>
-                      <a:prstDash val="solid"/>
-                    </a:lnBlToTr>
-                    <a:solidFill>
-                      <a:srgbClr val="062DEC"/>
-                    </a:solidFill>
-                  </a:tcPr>
-                </a:tc>
-                <a:tc>
-                  <a:txBody>
-                    <a:bodyPr/>
-                    <a:lstStyle/>
-                    <a:p>
-                      <a:r>
-                        <a:rPr lang="en-US" sz="1400" b="1" dirty="0"/>
-                        <a:t>Bandwidth (MHz)</a:t>
-                      </a:r>
-                    </a:p>
-                  </a:txBody>
-                  <a:tcPr>
-                    <a:lnL w="12700" cmpd="sng">
-                      <a:noFill/>
-                    </a:lnL>
-                    <a:lnR w="12700" cmpd="sng">
-                      <a:noFill/>
-                    </a:lnR>
-                    <a:lnT w="12700" cmpd="sng">
-                      <a:noFill/>
-                    </a:lnT>
-                    <a:lnB w="12700" cap="flat" cmpd="sng" algn="ctr">
-                      <a:solidFill>
-                        <a:schemeClr val="tx1"/>
-                      </a:solidFill>
-                      <a:prstDash val="solid"/>
-                      <a:round/>
-                      <a:headEnd type="none" w="med" len="med"/>
-                      <a:tailEnd type="none" w="med" len="med"/>
-                    </a:lnB>
-                    <a:lnTlToBr w="12700" cmpd="sng">
-                      <a:noFill/>
-                      <a:prstDash val="solid"/>
-                    </a:lnTlToBr>
-                    <a:lnBlToTr w="12700" cmpd="sng">
-                      <a:noFill/>
-                      <a:prstDash val="solid"/>
-                    </a:lnBlToTr>
-                    <a:solidFill>
-                      <a:srgbClr val="062DEC"/>
-                    </a:solidFill>
-                  </a:tcPr>
-                </a:tc>
-                <a:tc>
-                  <a:txBody>
-                    <a:bodyPr/>
-                    <a:lstStyle/>
-                    <a:p>
-                      <a:r>
-                        <a:rPr lang="en-US" sz="1400" b="1" dirty="0"/>
-                        <a:t>Compute (units)</a:t>
-                      </a:r>
-                    </a:p>
-                  </a:txBody>
-                  <a:tcPr>
-                    <a:lnL w="12700" cmpd="sng">
-                      <a:noFill/>
-                    </a:lnL>
-                    <a:lnR w="12700" cmpd="sng">
-                      <a:noFill/>
-                    </a:lnR>
-                    <a:lnT w="12700" cmpd="sng">
-                      <a:noFill/>
-                    </a:lnT>
-                    <a:lnB w="12700" cap="flat" cmpd="sng" algn="ctr">
-                      <a:solidFill>
-                        <a:schemeClr val="tx1"/>
-                      </a:solidFill>
-                      <a:prstDash val="solid"/>
-                      <a:round/>
-                      <a:headEnd type="none" w="med" len="med"/>
-                      <a:tailEnd type="none" w="med" len="med"/>
-                    </a:lnB>
-                    <a:lnTlToBr w="12700" cmpd="sng">
-                      <a:noFill/>
-                      <a:prstDash val="solid"/>
-                    </a:lnTlToBr>
-                    <a:lnBlToTr w="12700" cmpd="sng">
-                      <a:noFill/>
-                      <a:prstDash val="solid"/>
-                    </a:lnBlToTr>
-                    <a:solidFill>
-                      <a:srgbClr val="062DEC"/>
-                    </a:solidFill>
-                  </a:tcPr>
-                </a:tc>
-                <a:tc>
-                  <a:txBody>
-                    <a:bodyPr/>
-                    <a:lstStyle/>
-                    <a:p>
-                      <a:r>
-                        <a:rPr lang="en-US" sz="1400" b="1" dirty="0"/>
-                        <a:t>Power (W)</a:t>
-                      </a:r>
-                    </a:p>
-                  </a:txBody>
-                  <a:tcPr>
-                    <a:lnL w="12700" cmpd="sng">
-                      <a:noFill/>
-                    </a:lnL>
-                    <a:lnR w="12700" cmpd="sng">
-                      <a:noFill/>
-                    </a:lnR>
-                    <a:lnT w="12700" cmpd="sng">
-                      <a:noFill/>
-                    </a:lnT>
-                    <a:lnB w="12700" cap="flat" cmpd="sng" algn="ctr">
-                      <a:solidFill>
-                        <a:schemeClr val="tx1"/>
-                      </a:solidFill>
-                      <a:prstDash val="solid"/>
-                      <a:round/>
-                      <a:headEnd type="none" w="med" len="med"/>
-                      <a:tailEnd type="none" w="med" len="med"/>
-                    </a:lnB>
-                    <a:lnTlToBr w="12700" cmpd="sng">
-                      <a:noFill/>
-                      <a:prstDash val="solid"/>
-                    </a:lnTlToBr>
-                    <a:lnBlToTr w="12700" cmpd="sng">
-                      <a:noFill/>
-                      <a:prstDash val="solid"/>
-                    </a:lnBlToTr>
-                    <a:solidFill>
-                      <a:srgbClr val="062DEC"/>
-                    </a:solidFill>
-                  </a:tcPr>
-                </a:tc>
-                <a:tc>
-                  <a:txBody>
-                    <a:bodyPr/>
-                    <a:lstStyle/>
-                    <a:p>
-                      <a:r>
-                        <a:rPr lang="en-US" sz="1400" b="1" dirty="0"/>
-                        <a:t>Storage (MB)</a:t>
-                      </a:r>
-                    </a:p>
-                  </a:txBody>
-                  <a:tcPr>
-                    <a:lnL w="12700" cmpd="sng">
-                      <a:noFill/>
-                    </a:lnL>
-                    <a:lnR w="12700" cmpd="sng">
-                      <a:noFill/>
-                    </a:lnR>
-                    <a:lnT w="12700" cmpd="sng">
-                      <a:noFill/>
-                    </a:lnT>
-                    <a:lnB w="12700" cap="flat" cmpd="sng" algn="ctr">
-                      <a:solidFill>
-                        <a:schemeClr val="tx1"/>
-                      </a:solidFill>
-                      <a:prstDash val="solid"/>
-                      <a:round/>
-                      <a:headEnd type="none" w="med" len="med"/>
-                      <a:tailEnd type="none" w="med" len="med"/>
-                    </a:lnB>
-                    <a:lnTlToBr w="12700" cmpd="sng">
-                      <a:noFill/>
-                      <a:prstDash val="solid"/>
-                    </a:lnTlToBr>
-                    <a:lnBlToTr w="12700" cmpd="sng">
-                      <a:noFill/>
-                      <a:prstDash val="solid"/>
-                    </a:lnBlToTr>
-                    <a:solidFill>
-                      <a:srgbClr val="062DEC"/>
-                    </a:solidFill>
-                  </a:tcPr>
-                </a:tc>
-                <a:extLst>
-                  <a:ext uri="{0D108BD9-81ED-4DB2-BD59-A6C34878D82A}">
-                    <a16:rowId xmlns:a16="http://schemas.microsoft.com/office/drawing/2014/main" val="563799654"/>
-                  </a:ext>
-                </a:extLst>
-              </a:tr>
-              <a:tr h="739785">
-                <a:tc>
-                  <a:txBody>
-                    <a:bodyPr/>
-                    <a:lstStyle/>
-                    <a:p>
-                      <a:r>
-                        <a:rPr lang="en-US" sz="1200" b="1" dirty="0">
-                          <a:solidFill>
-                            <a:srgbClr val="000000"/>
-                          </a:solidFill>
-                        </a:rPr>
-                        <a:t>eMBB</a:t>
-                      </a:r>
-                    </a:p>
-                  </a:txBody>
-                  <a:tcPr>
-                    <a:lnL w="12700" cmpd="sng">
-                      <a:noFill/>
-                    </a:lnL>
-                    <a:lnR w="12700" cmpd="sng">
-                      <a:noFill/>
-                    </a:lnR>
-                    <a:lnT w="12700" cap="flat" cmpd="sng" algn="ctr">
-                      <a:solidFill>
-                        <a:schemeClr val="tx1"/>
-                      </a:solidFill>
-                      <a:prstDash val="solid"/>
-                      <a:round/>
-                      <a:headEnd type="none" w="med" len="med"/>
-                      <a:tailEnd type="none" w="med" len="med"/>
-                    </a:lnT>
-                    <a:lnB w="12700" cap="flat" cmpd="sng" algn="ctr">
-                      <a:solidFill>
-                        <a:schemeClr val="tx1"/>
-                      </a:solidFill>
-                      <a:prstDash val="solid"/>
-                      <a:round/>
-                      <a:headEnd type="none" w="med" len="med"/>
-                      <a:tailEnd type="none" w="med" len="med"/>
-                    </a:lnB>
-                    <a:lnTlToBr w="12700" cmpd="sng">
-                      <a:noFill/>
-                      <a:prstDash val="solid"/>
-                    </a:lnTlToBr>
-                    <a:lnBlToTr w="12700" cmpd="sng">
-                      <a:noFill/>
-                      <a:prstDash val="solid"/>
-                    </a:lnBlToTr>
-                    <a:solidFill>
-                      <a:srgbClr val="FFFFFF"/>
-                    </a:solidFill>
-                  </a:tcPr>
-                </a:tc>
-                <a:tc>
-                  <a:txBody>
-                    <a:bodyPr/>
-                    <a:lstStyle/>
-                    <a:p>
-                      <a:r>
-                        <a:rPr lang="en-US" sz="1200" b="1" dirty="0">
-                          <a:solidFill>
-                            <a:srgbClr val="000000"/>
-                          </a:solidFill>
-                        </a:rPr>
-                        <a:t>148.8003</a:t>
-                      </a:r>
-                    </a:p>
-                  </a:txBody>
-                  <a:tcPr>
-                    <a:lnL w="12700" cmpd="sng">
-                      <a:noFill/>
-                    </a:lnL>
-                    <a:lnR w="12700" cmpd="sng">
-                      <a:noFill/>
-                    </a:lnR>
-                    <a:lnT w="12700" cap="flat" cmpd="sng" algn="ctr">
-                      <a:solidFill>
-                        <a:schemeClr val="tx1"/>
-                      </a:solidFill>
-                      <a:prstDash val="solid"/>
-                      <a:round/>
-                      <a:headEnd type="none" w="med" len="med"/>
-                      <a:tailEnd type="none" w="med" len="med"/>
-                    </a:lnT>
-                    <a:lnB w="12700" cap="flat" cmpd="sng" algn="ctr">
-                      <a:solidFill>
-                        <a:schemeClr val="tx1"/>
-                      </a:solidFill>
-                      <a:prstDash val="solid"/>
-                      <a:round/>
-                      <a:headEnd type="none" w="med" len="med"/>
-                      <a:tailEnd type="none" w="med" len="med"/>
-                    </a:lnB>
-                    <a:lnTlToBr w="12700" cmpd="sng">
-                      <a:noFill/>
-                      <a:prstDash val="solid"/>
-                    </a:lnTlToBr>
-                    <a:lnBlToTr w="12700" cmpd="sng">
-                      <a:noFill/>
-                      <a:prstDash val="solid"/>
-                    </a:lnBlToTr>
-                    <a:solidFill>
-                      <a:srgbClr val="FFFFFF"/>
-                    </a:solidFill>
-                  </a:tcPr>
-                </a:tc>
-                <a:tc>
-                  <a:txBody>
-                    <a:bodyPr/>
-                    <a:lstStyle/>
-                    <a:p>
-                      <a:r>
-                        <a:rPr lang="en-US" sz="1200" b="1" dirty="0">
-                          <a:solidFill>
-                            <a:srgbClr val="000000"/>
-                          </a:solidFill>
-                        </a:rPr>
-                        <a:t>1.0405</a:t>
-                      </a:r>
-                    </a:p>
-                  </a:txBody>
-                  <a:tcPr>
-                    <a:lnL w="12700" cmpd="sng">
-                      <a:noFill/>
-                    </a:lnL>
-                    <a:lnR w="12700" cmpd="sng">
-                      <a:noFill/>
-                    </a:lnR>
-                    <a:lnT w="12700" cap="flat" cmpd="sng" algn="ctr">
-                      <a:solidFill>
-                        <a:schemeClr val="tx1"/>
-                      </a:solidFill>
-                      <a:prstDash val="solid"/>
-                      <a:round/>
-                      <a:headEnd type="none" w="med" len="med"/>
-                      <a:tailEnd type="none" w="med" len="med"/>
-                    </a:lnT>
-                    <a:lnB w="12700" cap="flat" cmpd="sng" algn="ctr">
-                      <a:solidFill>
-                        <a:schemeClr val="tx1"/>
-                      </a:solidFill>
-                      <a:prstDash val="solid"/>
-                      <a:round/>
-                      <a:headEnd type="none" w="med" len="med"/>
-                      <a:tailEnd type="none" w="med" len="med"/>
-                    </a:lnB>
-                    <a:lnTlToBr w="12700" cmpd="sng">
-                      <a:noFill/>
-                      <a:prstDash val="solid"/>
-                    </a:lnTlToBr>
-                    <a:lnBlToTr w="12700" cmpd="sng">
-                      <a:noFill/>
-                      <a:prstDash val="solid"/>
-                    </a:lnBlToTr>
-                    <a:solidFill>
-                      <a:srgbClr val="FFFFFF"/>
-                    </a:solidFill>
-                  </a:tcPr>
-                </a:tc>
-                <a:tc>
-                  <a:txBody>
-                    <a:bodyPr/>
-                    <a:lstStyle/>
-                    <a:p>
-                      <a:r>
-                        <a:rPr lang="en-US" sz="1200" b="1" dirty="0">
-                          <a:solidFill>
-                            <a:srgbClr val="000000"/>
-                          </a:solidFill>
-                        </a:rPr>
-                        <a:t>100.0</a:t>
-                      </a:r>
-                    </a:p>
-                  </a:txBody>
-                  <a:tcPr>
-                    <a:lnL w="12700" cmpd="sng">
-                      <a:noFill/>
-                    </a:lnL>
-                    <a:lnR w="12700" cmpd="sng">
-                      <a:noFill/>
-                    </a:lnR>
-                    <a:lnT w="12700" cap="flat" cmpd="sng" algn="ctr">
-                      <a:solidFill>
-                        <a:schemeClr val="tx1"/>
-                      </a:solidFill>
-                      <a:prstDash val="solid"/>
-                      <a:round/>
-                      <a:headEnd type="none" w="med" len="med"/>
-                      <a:tailEnd type="none" w="med" len="med"/>
-                    </a:lnT>
-                    <a:lnB w="12700" cap="flat" cmpd="sng" algn="ctr">
-                      <a:solidFill>
-                        <a:schemeClr val="tx1"/>
-                      </a:solidFill>
-                      <a:prstDash val="solid"/>
-                      <a:round/>
-                      <a:headEnd type="none" w="med" len="med"/>
-                      <a:tailEnd type="none" w="med" len="med"/>
-                    </a:lnB>
-                    <a:lnTlToBr w="12700" cmpd="sng">
-                      <a:noFill/>
-                      <a:prstDash val="solid"/>
-                    </a:lnTlToBr>
-                    <a:lnBlToTr w="12700" cmpd="sng">
-                      <a:noFill/>
-                      <a:prstDash val="solid"/>
-                    </a:lnBlToTr>
-                    <a:solidFill>
-                      <a:srgbClr val="FFFFFF"/>
-                    </a:solidFill>
-                  </a:tcPr>
-                </a:tc>
-                <a:tc>
-                  <a:txBody>
-                    <a:bodyPr/>
-                    <a:lstStyle/>
-                    <a:p>
-                      <a:r>
-                        <a:rPr lang="en-US" sz="1200" b="1" dirty="0">
-                          <a:solidFill>
-                            <a:srgbClr val="000000"/>
-                          </a:solidFill>
-                        </a:rPr>
-                        <a:t>1.3293</a:t>
-                      </a:r>
-                    </a:p>
-                  </a:txBody>
-                  <a:tcPr>
-                    <a:lnL w="12700" cmpd="sng">
-                      <a:noFill/>
-                    </a:lnL>
-                    <a:lnR w="12700" cmpd="sng">
-                      <a:noFill/>
-                    </a:lnR>
-                    <a:lnT w="12700" cap="flat" cmpd="sng" algn="ctr">
-                      <a:solidFill>
-                        <a:schemeClr val="tx1"/>
-                      </a:solidFill>
-                      <a:prstDash val="solid"/>
-                      <a:round/>
-                      <a:headEnd type="none" w="med" len="med"/>
-                      <a:tailEnd type="none" w="med" len="med"/>
-                    </a:lnT>
-                    <a:lnB w="12700" cap="flat" cmpd="sng" algn="ctr">
-                      <a:solidFill>
-                        <a:schemeClr val="tx1"/>
-                      </a:solidFill>
-                      <a:prstDash val="solid"/>
-                      <a:round/>
-                      <a:headEnd type="none" w="med" len="med"/>
-                      <a:tailEnd type="none" w="med" len="med"/>
-                    </a:lnB>
-                    <a:lnTlToBr w="12700" cmpd="sng">
-                      <a:noFill/>
-                      <a:prstDash val="solid"/>
-                    </a:lnTlToBr>
-                    <a:lnBlToTr w="12700" cmpd="sng">
-                      <a:noFill/>
-                      <a:prstDash val="solid"/>
-                    </a:lnBlToTr>
-                    <a:solidFill>
-                      <a:srgbClr val="FFFFFF"/>
-                    </a:solidFill>
-                  </a:tcPr>
-                </a:tc>
-                <a:extLst>
-                  <a:ext uri="{0D108BD9-81ED-4DB2-BD59-A6C34878D82A}">
-                    <a16:rowId xmlns:a16="http://schemas.microsoft.com/office/drawing/2014/main" val="1717596611"/>
-                  </a:ext>
-                </a:extLst>
-              </a:tr>
-              <a:tr h="739785">
-                <a:tc>
-                  <a:txBody>
-                    <a:bodyPr/>
-                    <a:lstStyle/>
-                    <a:p>
-                      <a:r>
-                        <a:rPr lang="en-US" sz="1200" b="1">
-                          <a:solidFill>
-                            <a:srgbClr val="000000"/>
-                          </a:solidFill>
-                        </a:rPr>
-                        <a:t>URLLC</a:t>
-                      </a:r>
-                    </a:p>
-                  </a:txBody>
-                  <a:tcPr>
-                    <a:lnL w="12700" cmpd="sng">
-                      <a:noFill/>
-                    </a:lnL>
-                    <a:lnR w="12700" cmpd="sng">
-                      <a:noFill/>
-                    </a:lnR>
-                    <a:lnT w="12700" cap="flat" cmpd="sng" algn="ctr">
-                      <a:solidFill>
-                        <a:schemeClr val="tx1"/>
-                      </a:solidFill>
-                      <a:prstDash val="solid"/>
-                      <a:round/>
-                      <a:headEnd type="none" w="med" len="med"/>
-                      <a:tailEnd type="none" w="med" len="med"/>
-                    </a:lnT>
-                    <a:lnB w="12700" cap="flat" cmpd="sng" algn="ctr">
-                      <a:solidFill>
-                        <a:schemeClr val="tx1"/>
-                      </a:solidFill>
-                      <a:prstDash val="solid"/>
-                      <a:round/>
-                      <a:headEnd type="none" w="med" len="med"/>
-                      <a:tailEnd type="none" w="med" len="med"/>
-                    </a:lnB>
-                    <a:lnTlToBr w="12700" cmpd="sng">
-                      <a:noFill/>
-                      <a:prstDash val="solid"/>
-                    </a:lnTlToBr>
-                    <a:lnBlToTr w="12700" cmpd="sng">
-                      <a:noFill/>
-                      <a:prstDash val="solid"/>
-                    </a:lnBlToTr>
-                    <a:solidFill>
-                      <a:srgbClr val="FFFFFF"/>
-                    </a:solidFill>
-                  </a:tcPr>
-                </a:tc>
-                <a:tc>
-                  <a:txBody>
-                    <a:bodyPr/>
-                    <a:lstStyle/>
-                    <a:p>
-                      <a:r>
-                        <a:rPr lang="en-US" sz="1200" b="1" dirty="0">
-                          <a:solidFill>
-                            <a:srgbClr val="000000"/>
-                          </a:solidFill>
-                        </a:rPr>
-                        <a:t>63.5638</a:t>
-                      </a:r>
-                    </a:p>
-                  </a:txBody>
-                  <a:tcPr>
-                    <a:lnL w="12700" cmpd="sng">
-                      <a:noFill/>
-                    </a:lnL>
-                    <a:lnR w="12700" cmpd="sng">
-                      <a:noFill/>
-                    </a:lnR>
-                    <a:lnT w="12700" cap="flat" cmpd="sng" algn="ctr">
-                      <a:solidFill>
-                        <a:schemeClr val="tx1"/>
-                      </a:solidFill>
-                      <a:prstDash val="solid"/>
-                      <a:round/>
-                      <a:headEnd type="none" w="med" len="med"/>
-                      <a:tailEnd type="none" w="med" len="med"/>
-                    </a:lnT>
-                    <a:lnB w="12700" cap="flat" cmpd="sng" algn="ctr">
-                      <a:solidFill>
-                        <a:schemeClr val="tx1"/>
-                      </a:solidFill>
-                      <a:prstDash val="solid"/>
-                      <a:round/>
-                      <a:headEnd type="none" w="med" len="med"/>
-                      <a:tailEnd type="none" w="med" len="med"/>
-                    </a:lnB>
-                    <a:lnTlToBr w="12700" cmpd="sng">
-                      <a:noFill/>
-                      <a:prstDash val="solid"/>
-                    </a:lnTlToBr>
-                    <a:lnBlToTr w="12700" cmpd="sng">
-                      <a:noFill/>
-                      <a:prstDash val="solid"/>
-                    </a:lnBlToTr>
-                    <a:solidFill>
-                      <a:srgbClr val="FFFFFF"/>
-                    </a:solidFill>
-                  </a:tcPr>
-                </a:tc>
-                <a:tc>
-                  <a:txBody>
-                    <a:bodyPr/>
-                    <a:lstStyle/>
-                    <a:p>
-                      <a:r>
-                        <a:rPr lang="en-US" sz="1200" b="1" dirty="0">
-                          <a:solidFill>
-                            <a:srgbClr val="000000"/>
-                          </a:solidFill>
-                        </a:rPr>
-                        <a:t>0.9841</a:t>
-                      </a:r>
-                    </a:p>
-                  </a:txBody>
-                  <a:tcPr>
-                    <a:lnL w="12700" cmpd="sng">
-                      <a:noFill/>
-                    </a:lnL>
-                    <a:lnR w="12700" cmpd="sng">
-                      <a:noFill/>
-                    </a:lnR>
-                    <a:lnT w="12700" cap="flat" cmpd="sng" algn="ctr">
-                      <a:solidFill>
-                        <a:schemeClr val="tx1"/>
-                      </a:solidFill>
-                      <a:prstDash val="solid"/>
-                      <a:round/>
-                      <a:headEnd type="none" w="med" len="med"/>
-                      <a:tailEnd type="none" w="med" len="med"/>
-                    </a:lnT>
-                    <a:lnB w="12700" cap="flat" cmpd="sng" algn="ctr">
-                      <a:solidFill>
-                        <a:schemeClr val="tx1"/>
-                      </a:solidFill>
-                      <a:prstDash val="solid"/>
-                      <a:round/>
-                      <a:headEnd type="none" w="med" len="med"/>
-                      <a:tailEnd type="none" w="med" len="med"/>
-                    </a:lnB>
-                    <a:lnTlToBr w="12700" cmpd="sng">
-                      <a:noFill/>
-                      <a:prstDash val="solid"/>
-                    </a:lnTlToBr>
-                    <a:lnBlToTr w="12700" cmpd="sng">
-                      <a:noFill/>
-                      <a:prstDash val="solid"/>
-                    </a:lnBlToTr>
-                    <a:solidFill>
-                      <a:srgbClr val="FFFFFF"/>
-                    </a:solidFill>
-                  </a:tcPr>
-                </a:tc>
-                <a:tc>
-                  <a:txBody>
-                    <a:bodyPr/>
-                    <a:lstStyle/>
-                    <a:p>
-                      <a:r>
-                        <a:rPr lang="en-US" sz="1200" b="1" dirty="0">
-                          <a:solidFill>
-                            <a:srgbClr val="000000"/>
-                          </a:solidFill>
-                        </a:rPr>
-                        <a:t>100.0</a:t>
-                      </a:r>
-                    </a:p>
-                  </a:txBody>
-                  <a:tcPr>
-                    <a:lnL w="12700" cmpd="sng">
-                      <a:noFill/>
-                    </a:lnL>
-                    <a:lnR w="12700" cmpd="sng">
-                      <a:noFill/>
-                    </a:lnR>
-                    <a:lnT w="12700" cap="flat" cmpd="sng" algn="ctr">
-                      <a:solidFill>
-                        <a:schemeClr val="tx1"/>
-                      </a:solidFill>
-                      <a:prstDash val="solid"/>
-                      <a:round/>
-                      <a:headEnd type="none" w="med" len="med"/>
-                      <a:tailEnd type="none" w="med" len="med"/>
-                    </a:lnT>
-                    <a:lnB w="12700" cap="flat" cmpd="sng" algn="ctr">
-                      <a:solidFill>
-                        <a:schemeClr val="tx1"/>
-                      </a:solidFill>
-                      <a:prstDash val="solid"/>
-                      <a:round/>
-                      <a:headEnd type="none" w="med" len="med"/>
-                      <a:tailEnd type="none" w="med" len="med"/>
-                    </a:lnB>
-                    <a:lnTlToBr w="12700" cmpd="sng">
-                      <a:noFill/>
-                      <a:prstDash val="solid"/>
-                    </a:lnTlToBr>
-                    <a:lnBlToTr w="12700" cmpd="sng">
-                      <a:noFill/>
-                      <a:prstDash val="solid"/>
-                    </a:lnBlToTr>
-                    <a:solidFill>
-                      <a:srgbClr val="FFFFFF"/>
-                    </a:solidFill>
-                  </a:tcPr>
-                </a:tc>
-                <a:tc>
-                  <a:txBody>
-                    <a:bodyPr/>
-                    <a:lstStyle/>
-                    <a:p>
-                      <a:r>
-                        <a:rPr lang="en-US" sz="1200" b="1" dirty="0">
-                          <a:solidFill>
-                            <a:srgbClr val="000000"/>
-                          </a:solidFill>
-                        </a:rPr>
-                        <a:t>1.0729</a:t>
-                      </a:r>
-                    </a:p>
-                  </a:txBody>
-                  <a:tcPr>
-                    <a:lnL w="12700" cmpd="sng">
-                      <a:noFill/>
-                    </a:lnL>
-                    <a:lnR w="12700" cmpd="sng">
-                      <a:noFill/>
-                    </a:lnR>
-                    <a:lnT w="12700" cap="flat" cmpd="sng" algn="ctr">
-                      <a:solidFill>
-                        <a:schemeClr val="tx1"/>
-                      </a:solidFill>
-                      <a:prstDash val="solid"/>
-                      <a:round/>
-                      <a:headEnd type="none" w="med" len="med"/>
-                      <a:tailEnd type="none" w="med" len="med"/>
-                    </a:lnT>
-                    <a:lnB w="12700" cap="flat" cmpd="sng" algn="ctr">
-                      <a:solidFill>
-                        <a:schemeClr val="tx1"/>
-                      </a:solidFill>
-                      <a:prstDash val="solid"/>
-                      <a:round/>
-                      <a:headEnd type="none" w="med" len="med"/>
-                      <a:tailEnd type="none" w="med" len="med"/>
-                    </a:lnB>
-                    <a:lnTlToBr w="12700" cmpd="sng">
-                      <a:noFill/>
-                      <a:prstDash val="solid"/>
-                    </a:lnTlToBr>
-                    <a:lnBlToTr w="12700" cmpd="sng">
-                      <a:noFill/>
-                      <a:prstDash val="solid"/>
-                    </a:lnBlToTr>
-                    <a:solidFill>
-                      <a:srgbClr val="FFFFFF"/>
-                    </a:solidFill>
-                  </a:tcPr>
-                </a:tc>
-                <a:extLst>
-                  <a:ext uri="{0D108BD9-81ED-4DB2-BD59-A6C34878D82A}">
-                    <a16:rowId xmlns:a16="http://schemas.microsoft.com/office/drawing/2014/main" val="1446919316"/>
-                  </a:ext>
-                </a:extLst>
-              </a:tr>
-              <a:tr h="739785">
-                <a:tc>
-                  <a:txBody>
-                    <a:bodyPr/>
-                    <a:lstStyle/>
-                    <a:p>
-                      <a:r>
-                        <a:rPr lang="en-US" sz="1200" b="1" dirty="0">
-                          <a:solidFill>
-                            <a:srgbClr val="000000"/>
-                          </a:solidFill>
-                        </a:rPr>
-                        <a:t>mMTC</a:t>
-                      </a:r>
-                    </a:p>
-                  </a:txBody>
-                  <a:tcPr>
-                    <a:lnL w="12700" cmpd="sng">
-                      <a:noFill/>
-                    </a:lnL>
-                    <a:lnR w="12700" cmpd="sng">
-                      <a:noFill/>
-                    </a:lnR>
-                    <a:lnT w="12700" cap="flat" cmpd="sng" algn="ctr">
-                      <a:solidFill>
-                        <a:schemeClr val="tx1"/>
-                      </a:solidFill>
-                      <a:prstDash val="solid"/>
-                      <a:round/>
-                      <a:headEnd type="none" w="med" len="med"/>
-                      <a:tailEnd type="none" w="med" len="med"/>
-                    </a:lnT>
-                    <a:lnB w="12700" cap="flat" cmpd="sng" algn="ctr">
-                      <a:solidFill>
-                        <a:schemeClr val="tx1"/>
-                      </a:solidFill>
-                      <a:prstDash val="solid"/>
-                      <a:round/>
-                      <a:headEnd type="none" w="med" len="med"/>
-                      <a:tailEnd type="none" w="med" len="med"/>
-                    </a:lnB>
-                    <a:lnTlToBr w="12700" cmpd="sng">
-                      <a:noFill/>
-                      <a:prstDash val="solid"/>
-                    </a:lnTlToBr>
-                    <a:lnBlToTr w="12700" cmpd="sng">
-                      <a:noFill/>
-                      <a:prstDash val="solid"/>
-                    </a:lnBlToTr>
-                    <a:solidFill>
-                      <a:srgbClr val="FFFFFF"/>
-                    </a:solidFill>
-                  </a:tcPr>
-                </a:tc>
-                <a:tc>
-                  <a:txBody>
-                    <a:bodyPr/>
-                    <a:lstStyle/>
-                    <a:p>
-                      <a:r>
-                        <a:rPr lang="en-US" sz="1200" b="1">
-                          <a:solidFill>
-                            <a:srgbClr val="000000"/>
-                          </a:solidFill>
-                        </a:rPr>
-                        <a:t>87.3869</a:t>
-                      </a:r>
-                    </a:p>
-                  </a:txBody>
-                  <a:tcPr>
-                    <a:lnL w="12700" cmpd="sng">
-                      <a:noFill/>
-                    </a:lnL>
-                    <a:lnR w="12700" cmpd="sng">
-                      <a:noFill/>
-                    </a:lnR>
-                    <a:lnT w="12700" cap="flat" cmpd="sng" algn="ctr">
-                      <a:solidFill>
-                        <a:schemeClr val="tx1"/>
-                      </a:solidFill>
-                      <a:prstDash val="solid"/>
-                      <a:round/>
-                      <a:headEnd type="none" w="med" len="med"/>
-                      <a:tailEnd type="none" w="med" len="med"/>
-                    </a:lnT>
-                    <a:lnB w="12700" cap="flat" cmpd="sng" algn="ctr">
-                      <a:solidFill>
-                        <a:schemeClr val="tx1"/>
-                      </a:solidFill>
-                      <a:prstDash val="solid"/>
-                      <a:round/>
-                      <a:headEnd type="none" w="med" len="med"/>
-                      <a:tailEnd type="none" w="med" len="med"/>
-                    </a:lnB>
-                    <a:lnTlToBr w="12700" cmpd="sng">
-                      <a:noFill/>
-                      <a:prstDash val="solid"/>
-                    </a:lnTlToBr>
-                    <a:lnBlToTr w="12700" cmpd="sng">
-                      <a:noFill/>
-                      <a:prstDash val="solid"/>
-                    </a:lnBlToTr>
-                    <a:solidFill>
-                      <a:srgbClr val="FFFFFF"/>
-                    </a:solidFill>
-                  </a:tcPr>
-                </a:tc>
-                <a:tc>
-                  <a:txBody>
-                    <a:bodyPr/>
-                    <a:lstStyle/>
-                    <a:p>
-                      <a:r>
-                        <a:rPr lang="en-US" sz="1200" b="1" dirty="0">
-                          <a:solidFill>
-                            <a:srgbClr val="000000"/>
-                          </a:solidFill>
-                        </a:rPr>
-                        <a:t>0.0711</a:t>
-                      </a:r>
-                    </a:p>
-                  </a:txBody>
-                  <a:tcPr>
-                    <a:lnL w="12700" cmpd="sng">
-                      <a:noFill/>
-                    </a:lnL>
-                    <a:lnR w="12700" cmpd="sng">
-                      <a:noFill/>
-                    </a:lnR>
-                    <a:lnT w="12700" cap="flat" cmpd="sng" algn="ctr">
-                      <a:solidFill>
-                        <a:schemeClr val="tx1"/>
-                      </a:solidFill>
-                      <a:prstDash val="solid"/>
-                      <a:round/>
-                      <a:headEnd type="none" w="med" len="med"/>
-                      <a:tailEnd type="none" w="med" len="med"/>
-                    </a:lnT>
-                    <a:lnB w="12700" cap="flat" cmpd="sng" algn="ctr">
-                      <a:solidFill>
-                        <a:schemeClr val="tx1"/>
-                      </a:solidFill>
-                      <a:prstDash val="solid"/>
-                      <a:round/>
-                      <a:headEnd type="none" w="med" len="med"/>
-                      <a:tailEnd type="none" w="med" len="med"/>
-                    </a:lnB>
-                    <a:lnTlToBr w="12700" cmpd="sng">
-                      <a:noFill/>
-                      <a:prstDash val="solid"/>
-                    </a:lnTlToBr>
-                    <a:lnBlToTr w="12700" cmpd="sng">
-                      <a:noFill/>
-                      <a:prstDash val="solid"/>
-                    </a:lnBlToTr>
-                    <a:solidFill>
-                      <a:srgbClr val="FFFFFF"/>
-                    </a:solidFill>
-                  </a:tcPr>
-                </a:tc>
-                <a:tc>
-                  <a:txBody>
-                    <a:bodyPr/>
-                    <a:lstStyle/>
-                    <a:p>
-                      <a:r>
-                        <a:rPr lang="en-US" sz="1200" b="1" dirty="0">
-                          <a:solidFill>
-                            <a:srgbClr val="000000"/>
-                          </a:solidFill>
-                        </a:rPr>
-                        <a:t>100.0</a:t>
-                      </a:r>
-                    </a:p>
-                  </a:txBody>
-                  <a:tcPr>
-                    <a:lnL w="12700" cmpd="sng">
-                      <a:noFill/>
-                    </a:lnL>
-                    <a:lnR w="12700" cmpd="sng">
-                      <a:noFill/>
-                    </a:lnR>
-                    <a:lnT w="12700" cap="flat" cmpd="sng" algn="ctr">
-                      <a:solidFill>
-                        <a:schemeClr val="tx1"/>
-                      </a:solidFill>
-                      <a:prstDash val="solid"/>
-                      <a:round/>
-                      <a:headEnd type="none" w="med" len="med"/>
-                      <a:tailEnd type="none" w="med" len="med"/>
-                    </a:lnT>
-                    <a:lnB w="12700" cap="flat" cmpd="sng" algn="ctr">
-                      <a:solidFill>
-                        <a:schemeClr val="tx1"/>
-                      </a:solidFill>
-                      <a:prstDash val="solid"/>
-                      <a:round/>
-                      <a:headEnd type="none" w="med" len="med"/>
-                      <a:tailEnd type="none" w="med" len="med"/>
-                    </a:lnB>
-                    <a:lnTlToBr w="12700" cmpd="sng">
-                      <a:noFill/>
-                      <a:prstDash val="solid"/>
-                    </a:lnTlToBr>
-                    <a:lnBlToTr w="12700" cmpd="sng">
-                      <a:noFill/>
-                      <a:prstDash val="solid"/>
-                    </a:lnBlToTr>
-                    <a:solidFill>
-                      <a:srgbClr val="FFFFFF"/>
-                    </a:solidFill>
-                  </a:tcPr>
-                </a:tc>
-                <a:tc>
-                  <a:txBody>
-                    <a:bodyPr/>
-                    <a:lstStyle/>
-                    <a:p>
-                      <a:r>
-                        <a:rPr lang="en-US" sz="1200" b="1" dirty="0">
-                          <a:solidFill>
-                            <a:srgbClr val="000000"/>
-                          </a:solidFill>
-                        </a:rPr>
-                        <a:t>0.5286</a:t>
-                      </a:r>
-                    </a:p>
-                  </a:txBody>
-                  <a:tcPr>
-                    <a:lnL w="12700" cmpd="sng">
-                      <a:noFill/>
-                    </a:lnL>
-                    <a:lnR w="12700" cmpd="sng">
-                      <a:noFill/>
-                    </a:lnR>
-                    <a:lnT w="12700" cap="flat" cmpd="sng" algn="ctr">
-                      <a:solidFill>
-                        <a:schemeClr val="tx1"/>
-                      </a:solidFill>
-                      <a:prstDash val="solid"/>
-                      <a:round/>
-                      <a:headEnd type="none" w="med" len="med"/>
-                      <a:tailEnd type="none" w="med" len="med"/>
-                    </a:lnT>
-                    <a:lnB w="12700" cap="flat" cmpd="sng" algn="ctr">
-                      <a:solidFill>
-                        <a:schemeClr val="tx1"/>
-                      </a:solidFill>
-                      <a:prstDash val="solid"/>
-                      <a:round/>
-                      <a:headEnd type="none" w="med" len="med"/>
-                      <a:tailEnd type="none" w="med" len="med"/>
-                    </a:lnB>
-                    <a:lnTlToBr w="12700" cmpd="sng">
-                      <a:noFill/>
-                      <a:prstDash val="solid"/>
-                    </a:lnTlToBr>
-                    <a:lnBlToTr w="12700" cmpd="sng">
-                      <a:noFill/>
-                      <a:prstDash val="solid"/>
-                    </a:lnBlToTr>
-                    <a:solidFill>
-                      <a:srgbClr val="FFFFFF"/>
-                    </a:solidFill>
-                  </a:tcPr>
-                </a:tc>
-                <a:extLst>
-                  <a:ext uri="{0D108BD9-81ED-4DB2-BD59-A6C34878D82A}">
-                    <a16:rowId xmlns:a16="http://schemas.microsoft.com/office/drawing/2014/main" val="1194088855"/>
-                  </a:ext>
-                </a:extLst>
-              </a:tr>
-              <a:tr h="739785">
-                <a:tc>
-                  <a:txBody>
-                    <a:bodyPr/>
-                    <a:lstStyle/>
-                    <a:p>
-                      <a:endParaRPr lang="en-US" sz="1200" b="1" dirty="0">
-                        <a:solidFill>
-                          <a:srgbClr val="000000"/>
-                        </a:solidFill>
-                      </a:endParaRPr>
-                    </a:p>
-                  </a:txBody>
-                  <a:tcPr>
-                    <a:lnL w="12700" cmpd="sng">
-                      <a:noFill/>
-                    </a:lnL>
-                    <a:lnR w="12700" cmpd="sng">
-                      <a:noFill/>
-                    </a:lnR>
-                    <a:lnT w="12700" cap="flat" cmpd="sng" algn="ctr">
-                      <a:solidFill>
-                        <a:schemeClr val="tx1"/>
-                      </a:solidFill>
-                      <a:prstDash val="solid"/>
-                      <a:round/>
-                      <a:headEnd type="none" w="med" len="med"/>
-                      <a:tailEnd type="none" w="med" len="med"/>
-                    </a:lnT>
-                    <a:lnB w="12700" cmpd="sng">
-                      <a:noFill/>
-                    </a:lnB>
-                    <a:lnTlToBr w="12700" cmpd="sng">
-                      <a:noFill/>
-                      <a:prstDash val="solid"/>
-                    </a:lnTlToBr>
-                    <a:lnBlToTr w="12700" cmpd="sng">
-                      <a:noFill/>
-                      <a:prstDash val="solid"/>
-                    </a:lnBlToTr>
-                    <a:solidFill>
-                      <a:srgbClr val="062DEC"/>
-                    </a:solidFill>
-                  </a:tcPr>
-                </a:tc>
-                <a:tc>
-                  <a:txBody>
-                    <a:bodyPr/>
-                    <a:lstStyle/>
-                    <a:p>
-                      <a:endParaRPr lang="en-US" sz="1200" b="1" dirty="0">
-                        <a:solidFill>
-                          <a:srgbClr val="000000"/>
-                        </a:solidFill>
-                      </a:endParaRPr>
-                    </a:p>
-                  </a:txBody>
-                  <a:tcPr>
-                    <a:lnL w="12700" cmpd="sng">
-                      <a:noFill/>
-                    </a:lnL>
-                    <a:lnR w="12700" cmpd="sng">
-                      <a:noFill/>
-                    </a:lnR>
-                    <a:lnT w="12700" cap="flat" cmpd="sng" algn="ctr">
-                      <a:solidFill>
-                        <a:schemeClr val="tx1"/>
-                      </a:solidFill>
-                      <a:prstDash val="solid"/>
-                      <a:round/>
-                      <a:headEnd type="none" w="med" len="med"/>
-                      <a:tailEnd type="none" w="med" len="med"/>
-                    </a:lnT>
-                    <a:lnB w="12700" cmpd="sng">
-                      <a:noFill/>
-                    </a:lnB>
-                    <a:lnTlToBr w="12700" cmpd="sng">
-                      <a:noFill/>
-                      <a:prstDash val="solid"/>
-                    </a:lnTlToBr>
-                    <a:lnBlToTr w="12700" cmpd="sng">
-                      <a:noFill/>
-                      <a:prstDash val="solid"/>
-                    </a:lnBlToTr>
-                    <a:solidFill>
-                      <a:srgbClr val="062DEC"/>
-                    </a:solidFill>
-                  </a:tcPr>
-                </a:tc>
-                <a:tc>
-                  <a:txBody>
-                    <a:bodyPr/>
-                    <a:lstStyle/>
-                    <a:p>
-                      <a:endParaRPr lang="en-US" sz="1200" b="1" dirty="0">
-                        <a:solidFill>
-                          <a:srgbClr val="000000"/>
-                        </a:solidFill>
-                      </a:endParaRPr>
-                    </a:p>
-                  </a:txBody>
-                  <a:tcPr>
-                    <a:lnL w="12700" cmpd="sng">
-                      <a:noFill/>
-                    </a:lnL>
-                    <a:lnR w="12700" cmpd="sng">
-                      <a:noFill/>
-                    </a:lnR>
-                    <a:lnT w="12700" cap="flat" cmpd="sng" algn="ctr">
-                      <a:solidFill>
-                        <a:schemeClr val="tx1"/>
-                      </a:solidFill>
-                      <a:prstDash val="solid"/>
-                      <a:round/>
-                      <a:headEnd type="none" w="med" len="med"/>
-                      <a:tailEnd type="none" w="med" len="med"/>
-                    </a:lnT>
-                    <a:lnB w="12700" cmpd="sng">
-                      <a:noFill/>
-                    </a:lnB>
-                    <a:lnTlToBr w="12700" cmpd="sng">
-                      <a:noFill/>
-                      <a:prstDash val="solid"/>
-                    </a:lnTlToBr>
-                    <a:lnBlToTr w="12700" cmpd="sng">
-                      <a:noFill/>
-                      <a:prstDash val="solid"/>
-                    </a:lnBlToTr>
-                    <a:solidFill>
-                      <a:srgbClr val="062DEC"/>
-                    </a:solidFill>
-                  </a:tcPr>
-                </a:tc>
-                <a:tc>
-                  <a:txBody>
-                    <a:bodyPr/>
-                    <a:lstStyle/>
-                    <a:p>
-                      <a:endParaRPr lang="en-US" sz="1200" b="1" dirty="0">
-                        <a:solidFill>
-                          <a:srgbClr val="000000"/>
-                        </a:solidFill>
-                      </a:endParaRPr>
-                    </a:p>
-                  </a:txBody>
-                  <a:tcPr>
-                    <a:lnL w="12700" cmpd="sng">
-                      <a:noFill/>
-                    </a:lnL>
-                    <a:lnR w="12700" cmpd="sng">
-                      <a:noFill/>
-                    </a:lnR>
-                    <a:lnT w="12700" cap="flat" cmpd="sng" algn="ctr">
-                      <a:solidFill>
-                        <a:schemeClr val="tx1"/>
-                      </a:solidFill>
-                      <a:prstDash val="solid"/>
-                      <a:round/>
-                      <a:headEnd type="none" w="med" len="med"/>
-                      <a:tailEnd type="none" w="med" len="med"/>
-                    </a:lnT>
-                    <a:lnB w="12700" cmpd="sng">
-                      <a:noFill/>
-                    </a:lnB>
-                    <a:lnTlToBr w="12700" cmpd="sng">
-                      <a:noFill/>
-                      <a:prstDash val="solid"/>
-                    </a:lnTlToBr>
-                    <a:lnBlToTr w="12700" cmpd="sng">
-                      <a:noFill/>
-                      <a:prstDash val="solid"/>
-                    </a:lnBlToTr>
-                    <a:solidFill>
-                      <a:srgbClr val="062DEC"/>
-                    </a:solidFill>
-                  </a:tcPr>
-                </a:tc>
-                <a:tc>
-                  <a:txBody>
-                    <a:bodyPr/>
-                    <a:lstStyle/>
-                    <a:p>
-                      <a:endParaRPr lang="en-US" sz="1200" b="1" dirty="0">
-                        <a:solidFill>
-                          <a:srgbClr val="000000"/>
-                        </a:solidFill>
-                      </a:endParaRPr>
-                    </a:p>
-                  </a:txBody>
-                  <a:tcPr>
-                    <a:lnL w="12700" cmpd="sng">
-                      <a:noFill/>
-                    </a:lnL>
-                    <a:lnR w="12700" cmpd="sng">
-                      <a:noFill/>
-                    </a:lnR>
-                    <a:lnT w="12700" cap="flat" cmpd="sng" algn="ctr">
-                      <a:solidFill>
-                        <a:schemeClr val="tx1"/>
-                      </a:solidFill>
-                      <a:prstDash val="solid"/>
-                      <a:round/>
-                      <a:headEnd type="none" w="med" len="med"/>
-                      <a:tailEnd type="none" w="med" len="med"/>
-                    </a:lnT>
-                    <a:lnB w="12700" cmpd="sng">
-                      <a:noFill/>
-                    </a:lnB>
-                    <a:lnTlToBr w="12700" cmpd="sng">
-                      <a:noFill/>
-                      <a:prstDash val="solid"/>
-                    </a:lnTlToBr>
-                    <a:lnBlToTr w="12700" cmpd="sng">
-                      <a:noFill/>
-                      <a:prstDash val="solid"/>
-                    </a:lnBlToTr>
-                    <a:solidFill>
-                      <a:srgbClr val="062DEC"/>
-                    </a:solidFill>
-                  </a:tcPr>
-                </a:tc>
-                <a:extLst>
-                  <a:ext uri="{0D108BD9-81ED-4DB2-BD59-A6C34878D82A}">
-                    <a16:rowId xmlns:a16="http://schemas.microsoft.com/office/drawing/2014/main" val="805411322"/>
-                  </a:ext>
-                </a:extLst>
-              </a:tr>
-            </a:tbl>
-          </a:graphicData>
-        </a:graphic>
-      </p:graphicFrame>
-      <p:sp>
-        <p:nvSpPr>
-          <p:cNvPr id="4" name="Slide Number Placeholder 3">
-            <a:extLst>
-              <a:ext uri="{FF2B5EF4-FFF2-40B4-BE49-F238E27FC236}">
-                <a16:creationId xmlns:a16="http://schemas.microsoft.com/office/drawing/2014/main" id="{E3977EA1-18A1-0C5A-DC91-B89FF101F701}"/>
-              </a:ext>
-            </a:extLst>
-          </p:cNvPr>
-          <p:cNvSpPr>
-            <a:spLocks noGrp="1"/>
-          </p:cNvSpPr>
-          <p:nvPr>
-            <p:ph type="sldNum" sz="quarter" idx="12"/>
-          </p:nvPr>
-        </p:nvSpPr>
-        <p:spPr/>
-        <p:txBody>
-          <a:bodyPr/>
-          <a:lstStyle/>
-          <a:p>
-            <a:fld id="{00A14CD1-B2ED-44D0-9C35-0F6E1DE20A5F}" type="slidenum">
-              <a:rPr lang="en-US" smtClean="0"/>
-              <a:t>2</a:t>
-            </a:fld>
-            <a:endParaRPr lang="en-US"/>
-          </a:p>
-        </p:txBody>
-      </p:sp>
-      <p:pic>
-        <p:nvPicPr>
-          <p:cNvPr id="5" name="Picture 2">
-            <a:extLst>
-              <a:ext uri="{FF2B5EF4-FFF2-40B4-BE49-F238E27FC236}">
-                <a16:creationId xmlns:a16="http://schemas.microsoft.com/office/drawing/2014/main" id="{997BA7BB-F927-AA42-0A6E-874F276273AB}"/>
-              </a:ext>
-            </a:extLst>
-          </p:cNvPr>
-          <p:cNvPicPr>
-            <a:picLocks noChangeAspect="1" noChangeArrowheads="1"/>
-          </p:cNvPicPr>
-          <p:nvPr/>
-        </p:nvPicPr>
-        <p:blipFill>
-          <a:blip r:embed="rId3">
-            <a:extLst>
-              <a:ext uri="{28A0092B-C50C-407E-A947-70E740481C1C}">
-                <a14:useLocalDpi xmlns:a14="http://schemas.microsoft.com/office/drawing/2010/main" val="0"/>
-              </a:ext>
-            </a:extLst>
-          </a:blip>
-          <a:srcRect/>
-          <a:stretch>
-            <a:fillRect/>
-          </a:stretch>
-        </p:blipFill>
-        <p:spPr bwMode="auto">
-          <a:xfrm>
-            <a:off x="136548" y="0"/>
-            <a:ext cx="2446591" cy="710722"/>
-          </a:xfrm>
-          <a:prstGeom prst="rect">
-            <a:avLst/>
-          </a:prstGeom>
-          <a:noFill/>
-          <a:ln>
-            <a:solidFill>
-              <a:srgbClr val="062DEC"/>
-            </a:solidFill>
-          </a:ln>
-          <a:extLst>
-            <a:ext uri="{909E8E84-426E-40DD-AFC4-6F175D3DCCD1}">
-              <a14:hiddenFill xmlns:a14="http://schemas.microsoft.com/office/drawing/2010/main">
-                <a:solidFill>
-                  <a:srgbClr val="FFFFFF"/>
-                </a:solidFill>
-              </a14:hiddenFill>
-            </a:ext>
-          </a:extLst>
-        </p:spPr>
-      </p:pic>
-    </p:spTree>
-    <p:extLst>
-      <p:ext uri="{BB962C8B-B14F-4D97-AF65-F5344CB8AC3E}">
-        <p14:creationId xmlns:p14="http://schemas.microsoft.com/office/powerpoint/2010/main" val="993639883"/>
-      </p:ext>
-    </p:extLst>
-  </p:cSld>
-  <p:clrMapOvr>
-    <a:masterClrMapping/>
-  </p:clrMapOvr>
-</p:sld>
-</file>
-
-<file path=ppt/slides/slide3.xml><?xml version="1.0" encoding="utf-8"?>
-<p:sld xmlns:a="http://schemas.openxmlformats.org/drawingml/2006/main" xmlns:r="http://schemas.openxmlformats.org/officeDocument/2006/relationships" xmlns:p="http://schemas.openxmlformats.org/presentationml/2006/main">
-  <p:cSld>
-    <p:spTree>
-      <p:nvGrpSpPr>
-        <p:cNvPr id="1" name=""/>
-        <p:cNvGrpSpPr/>
-        <p:nvPr/>
-      </p:nvGrpSpPr>
-      <p:grpSpPr>
-        <a:xfrm>
-          <a:off x="0" y="0"/>
-          <a:ext cx="0" cy="0"/>
-          <a:chOff x="0" y="0"/>
-          <a:chExt cx="0" cy="0"/>
-        </a:xfrm>
-      </p:grpSpPr>
-      <p:sp>
-        <p:nvSpPr>
-          <p:cNvPr id="2" name="TextBox 1">
-            <a:extLst>
-              <a:ext uri="{FF2B5EF4-FFF2-40B4-BE49-F238E27FC236}">
                 <a16:creationId xmlns:a16="http://schemas.microsoft.com/office/drawing/2014/main" id="{3F7F9029-DFE4-EC50-6688-69F11DC7812A}"/>
               </a:ext>
             </a:extLst>
@@ -5692,7 +4116,7 @@
           <p:nvPr>
             <p:extLst>
               <p:ext uri="{D42A27DB-BD31-4B8C-83A1-F6EECF244321}">
-                <p14:modId xmlns:p14="http://schemas.microsoft.com/office/powerpoint/2010/main" val="602608739"/>
+                <p14:modId xmlns:p14="http://schemas.microsoft.com/office/powerpoint/2010/main" val="4036940101"/>
               </p:ext>
             </p:extLst>
           </p:nvPr>
@@ -6016,7 +4440,7 @@
                     <a:p>
                       <a:r>
                         <a:rPr lang="en-US" sz="1400" b="1" dirty="0"/>
-                        <a:t>300.0</a:t>
+                        <a:t>100.0</a:t>
                       </a:r>
                     </a:p>
                   </a:txBody>
@@ -6241,7 +4665,7 @@
           <a:p>
             <a:fld id="{00A14CD1-B2ED-44D0-9C35-0F6E1DE20A5F}" type="slidenum">
               <a:rPr lang="en-US" smtClean="0"/>
-              <a:t>3</a:t>
+              <a:t>2</a:t>
             </a:fld>
             <a:endParaRPr lang="en-US"/>
           </a:p>
@@ -6307,7 +4731,7 @@
 </p:sld>
 </file>
 
-<file path=ppt/slides/slide4.xml><?xml version="1.0" encoding="utf-8"?>
+<file path=ppt/slides/slide3.xml><?xml version="1.0" encoding="utf-8"?>
 <p:sld xmlns:a="http://schemas.openxmlformats.org/drawingml/2006/main" xmlns:r="http://schemas.openxmlformats.org/officeDocument/2006/relationships" xmlns:p="http://schemas.openxmlformats.org/presentationml/2006/main">
   <p:cSld>
     <p:spTree>
@@ -7376,7 +5800,7 @@
           <a:p>
             <a:fld id="{00A14CD1-B2ED-44D0-9C35-0F6E1DE20A5F}" type="slidenum">
               <a:rPr lang="en-US" smtClean="0"/>
-              <a:t>4</a:t>
+              <a:t>3</a:t>
             </a:fld>
             <a:endParaRPr lang="en-US"/>
           </a:p>
@@ -7442,7 +5866,7 @@
 </p:sld>
 </file>
 
-<file path=ppt/slides/slide5.xml><?xml version="1.0" encoding="utf-8"?>
+<file path=ppt/slides/slide4.xml><?xml version="1.0" encoding="utf-8"?>
 <p:sld xmlns:a="http://schemas.openxmlformats.org/drawingml/2006/main" xmlns:r="http://schemas.openxmlformats.org/officeDocument/2006/relationships" xmlns:p="http://schemas.openxmlformats.org/presentationml/2006/main">
   <p:cSld>
     <p:spTree>
@@ -7509,7 +5933,7 @@
           <p:nvPr>
             <p:extLst>
               <p:ext uri="{D42A27DB-BD31-4B8C-83A1-F6EECF244321}">
-                <p14:modId xmlns:p14="http://schemas.microsoft.com/office/powerpoint/2010/main" val="713216529"/>
+                <p14:modId xmlns:p14="http://schemas.microsoft.com/office/powerpoint/2010/main" val="2407167253"/>
               </p:ext>
             </p:extLst>
           </p:nvPr>
@@ -7767,7 +6191,7 @@
                     <a:lstStyle/>
                     <a:p>
                       <a:r>
-                        <a:rPr lang="en-US" sz="1400" b="1" dirty="0"/>
+                        <a:rPr lang="en-US" sz="1200" b="1" dirty="0"/>
                         <a:t>eMBB</a:t>
                       </a:r>
                     </a:p>
@@ -7795,11 +6219,39 @@
                     <a:bodyPr/>
                     <a:lstStyle/>
                     <a:p>
+                      <a:pPr marL="0" marR="0" lvl="0" indent="0" algn="l" defTabSz="914400" rtl="0" eaLnBrk="1" fontAlgn="auto" latinLnBrk="0" hangingPunct="1">
+                        <a:lnSpc>
+                          <a:spcPct val="100000"/>
+                        </a:lnSpc>
+                        <a:spcBef>
+                          <a:spcPts val="0"/>
+                        </a:spcBef>
+                        <a:spcAft>
+                          <a:spcPts val="0"/>
+                        </a:spcAft>
+                        <a:buClrTx/>
+                        <a:buSzTx/>
+                        <a:buFontTx/>
+                        <a:buNone/>
+                        <a:tabLst/>
+                        <a:defRPr/>
+                      </a:pPr>
                       <a:r>
-                        <a:rPr lang="en-US" sz="1400" b="1" dirty="0"/>
-                        <a:t>677.1007</a:t>
+                        <a:rPr lang="en-US" sz="1200" b="1" kern="1200" dirty="0">
+                          <a:solidFill>
+                            <a:schemeClr val="dk1"/>
+                          </a:solidFill>
+                          <a:effectLst/>
+                          <a:latin typeface="+mn-lt"/>
+                          <a:ea typeface="+mn-ea"/>
+                          <a:cs typeface="+mn-cs"/>
+                        </a:rPr>
+                        <a:t>730.6518</a:t>
                       </a:r>
                     </a:p>
+                    <a:p>
+                      <a:endParaRPr lang="en-US" sz="1200" b="1" dirty="0"/>
+                    </a:p>
                   </a:txBody>
                   <a:tcPr>
                     <a:lnT w="38100" cmpd="sng">
@@ -7825,8 +6277,16 @@
                     <a:lstStyle/>
                     <a:p>
                       <a:r>
-                        <a:rPr lang="en-US" sz="1400" b="1"/>
-                        <a:t>0.0355</a:t>
+                        <a:rPr lang="en-US" sz="1200" b="1" kern="1200" dirty="0">
+                          <a:solidFill>
+                            <a:schemeClr val="dk1"/>
+                          </a:solidFill>
+                          <a:effectLst/>
+                          <a:latin typeface="+mn-lt"/>
+                          <a:ea typeface="+mn-ea"/>
+                          <a:cs typeface="+mn-cs"/>
+                        </a:rPr>
+                        <a:t>0.03286</a:t>
                       </a:r>
                     </a:p>
                   </a:txBody>
@@ -7854,8 +6314,16 @@
                     <a:lstStyle/>
                     <a:p>
                       <a:r>
-                        <a:rPr lang="en-US" sz="1400" b="1"/>
-                        <a:t>2.3698</a:t>
+                        <a:rPr lang="en-US" sz="1200" b="1" kern="1200" dirty="0">
+                          <a:solidFill>
+                            <a:schemeClr val="dk1"/>
+                          </a:solidFill>
+                          <a:effectLst/>
+                          <a:latin typeface="+mn-lt"/>
+                          <a:ea typeface="+mn-ea"/>
+                          <a:cs typeface="+mn-cs"/>
+                        </a:rPr>
+                        <a:t>10.0226</a:t>
                       </a:r>
                     </a:p>
                   </a:txBody>
@@ -7883,8 +6351,16 @@
                     <a:lstStyle/>
                     <a:p>
                       <a:r>
-                        <a:rPr lang="en-US" sz="1400" b="1" dirty="0"/>
-                        <a:t>100.0000</a:t>
+                        <a:rPr lang="en-US" sz="1200" b="1" kern="1200" dirty="0">
+                          <a:solidFill>
+                            <a:schemeClr val="dk1"/>
+                          </a:solidFill>
+                          <a:effectLst/>
+                          <a:latin typeface="+mn-lt"/>
+                          <a:ea typeface="+mn-ea"/>
+                          <a:cs typeface="+mn-cs"/>
+                        </a:rPr>
+                        <a:t>11.1520</a:t>
                       </a:r>
                     </a:p>
                   </a:txBody>
@@ -7919,7 +6395,7 @@
                     <a:lstStyle/>
                     <a:p>
                       <a:r>
-                        <a:rPr lang="en-US" sz="1400" b="1" dirty="0"/>
+                        <a:rPr lang="en-US" sz="1200" b="1" dirty="0"/>
                         <a:t>URLLC</a:t>
                       </a:r>
                     </a:p>
@@ -7954,8 +6430,16 @@
                     <a:lstStyle/>
                     <a:p>
                       <a:r>
-                        <a:rPr lang="en-US" sz="1400" b="1" dirty="0"/>
-                        <a:t>289.2406</a:t>
+                        <a:rPr lang="en-US" sz="1200" b="1" kern="1200" dirty="0">
+                          <a:solidFill>
+                            <a:schemeClr val="dk1"/>
+                          </a:solidFill>
+                          <a:effectLst/>
+                          <a:latin typeface="+mn-lt"/>
+                          <a:ea typeface="+mn-ea"/>
+                          <a:cs typeface="+mn-cs"/>
+                        </a:rPr>
+                        <a:t>212.4432</a:t>
                       </a:r>
                     </a:p>
                   </a:txBody>
@@ -7989,8 +6473,16 @@
                     <a:lstStyle/>
                     <a:p>
                       <a:r>
-                        <a:rPr lang="en-US" sz="1400" b="1" dirty="0"/>
-                        <a:t>0.0249</a:t>
+                        <a:rPr lang="en-US" sz="1200" b="1" kern="1200" dirty="0">
+                          <a:solidFill>
+                            <a:schemeClr val="dk1"/>
+                          </a:solidFill>
+                          <a:effectLst/>
+                          <a:latin typeface="+mn-lt"/>
+                          <a:ea typeface="+mn-ea"/>
+                          <a:cs typeface="+mn-cs"/>
+                        </a:rPr>
+                        <a:t>0.03395</a:t>
                       </a:r>
                     </a:p>
                   </a:txBody>
@@ -8024,8 +6516,16 @@
                     <a:lstStyle/>
                     <a:p>
                       <a:r>
-                        <a:rPr lang="en-US" sz="1400" b="1" dirty="0"/>
-                        <a:t>2.0569</a:t>
+                        <a:rPr lang="en-US" sz="1200" b="1" kern="1200" dirty="0">
+                          <a:solidFill>
+                            <a:schemeClr val="dk1"/>
+                          </a:solidFill>
+                          <a:effectLst/>
+                          <a:latin typeface="+mn-lt"/>
+                          <a:ea typeface="+mn-ea"/>
+                          <a:cs typeface="+mn-cs"/>
+                        </a:rPr>
+                        <a:t>38.24082</a:t>
                       </a:r>
                     </a:p>
                   </a:txBody>
@@ -8059,8 +6559,16 @@
                     <a:lstStyle/>
                     <a:p>
                       <a:r>
-                        <a:rPr lang="en-US" sz="1400" b="1" dirty="0"/>
-                        <a:t>100.0000</a:t>
+                        <a:rPr lang="en-US" sz="1200" b="1" kern="1200" dirty="0">
+                          <a:solidFill>
+                            <a:schemeClr val="dk1"/>
+                          </a:solidFill>
+                          <a:effectLst/>
+                          <a:latin typeface="+mn-lt"/>
+                          <a:ea typeface="+mn-ea"/>
+                          <a:cs typeface="+mn-cs"/>
+                        </a:rPr>
+                        <a:t>1.4455</a:t>
                       </a:r>
                     </a:p>
                   </a:txBody>
@@ -8101,7 +6609,7 @@
                     <a:lstStyle/>
                     <a:p>
                       <a:r>
-                        <a:rPr lang="en-US" sz="1400" b="1" dirty="0"/>
+                        <a:rPr lang="en-US" sz="1200" b="1" dirty="0"/>
                         <a:t>mMTC</a:t>
                       </a:r>
                     </a:p>
@@ -8134,8 +6642,16 @@
                     <a:lstStyle/>
                     <a:p>
                       <a:r>
-                        <a:rPr lang="en-US" sz="1400" b="1" dirty="0"/>
-                        <a:t>397.6456</a:t>
+                        <a:rPr lang="en-US" sz="1200" b="1" kern="1200" dirty="0">
+                          <a:solidFill>
+                            <a:schemeClr val="dk1"/>
+                          </a:solidFill>
+                          <a:effectLst/>
+                          <a:latin typeface="+mn-lt"/>
+                          <a:ea typeface="+mn-ea"/>
+                          <a:cs typeface="+mn-cs"/>
+                        </a:rPr>
+                        <a:t>415.9288</a:t>
                       </a:r>
                     </a:p>
                   </a:txBody>
@@ -8167,8 +6683,16 @@
                     <a:lstStyle/>
                     <a:p>
                       <a:r>
-                        <a:rPr lang="en-US" sz="1400" b="1" dirty="0"/>
-                        <a:t>0.1207</a:t>
+                        <a:rPr lang="en-US" sz="1200" b="1" kern="1200" dirty="0">
+                          <a:solidFill>
+                            <a:schemeClr val="dk1"/>
+                          </a:solidFill>
+                          <a:effectLst/>
+                          <a:latin typeface="+mn-lt"/>
+                          <a:ea typeface="+mn-ea"/>
+                          <a:cs typeface="+mn-cs"/>
+                        </a:rPr>
+                        <a:t>0.1155</a:t>
                       </a:r>
                     </a:p>
                   </a:txBody>
@@ -8200,8 +6724,16 @@
                     <a:lstStyle/>
                     <a:p>
                       <a:r>
-                        <a:rPr lang="en-US" sz="1400" b="1" dirty="0"/>
-                        <a:t>0.5997</a:t>
+                        <a:rPr lang="en-US" sz="1200" b="1" kern="1200" dirty="0">
+                          <a:solidFill>
+                            <a:schemeClr val="dk1"/>
+                          </a:solidFill>
+                          <a:effectLst/>
+                          <a:latin typeface="+mn-lt"/>
+                          <a:ea typeface="+mn-ea"/>
+                          <a:cs typeface="+mn-cs"/>
+                        </a:rPr>
+                        <a:t>4.0881</a:t>
                       </a:r>
                     </a:p>
                   </a:txBody>
@@ -8233,8 +6765,16 @@
                     <a:lstStyle/>
                     <a:p>
                       <a:r>
-                        <a:rPr lang="en-US" sz="1400" b="1" dirty="0"/>
-                        <a:t>100.0000</a:t>
+                        <a:rPr lang="en-US" sz="1200" b="1" kern="1200" dirty="0">
+                          <a:solidFill>
+                            <a:schemeClr val="dk1"/>
+                          </a:solidFill>
+                          <a:effectLst/>
+                          <a:latin typeface="+mn-lt"/>
+                          <a:ea typeface="+mn-ea"/>
+                          <a:cs typeface="+mn-cs"/>
+                        </a:rPr>
+                        <a:t>58.8746</a:t>
                       </a:r>
                     </a:p>
                   </a:txBody>
@@ -8490,7 +7030,7 @@
           <a:p>
             <a:fld id="{00A14CD1-B2ED-44D0-9C35-0F6E1DE20A5F}" type="slidenum">
               <a:rPr lang="en-US" smtClean="0"/>
-              <a:t>5</a:t>
+              <a:t>4</a:t>
             </a:fld>
             <a:endParaRPr lang="en-US"/>
           </a:p>
@@ -8556,7 +7096,7 @@
 </p:sld>
 </file>
 
-<file path=ppt/slides/slide6.xml><?xml version="1.0" encoding="utf-8"?>
+<file path=ppt/slides/slide5.xml><?xml version="1.0" encoding="utf-8"?>
 <p:sld xmlns:a="http://schemas.openxmlformats.org/drawingml/2006/main" xmlns:r="http://schemas.openxmlformats.org/officeDocument/2006/relationships" xmlns:p="http://schemas.openxmlformats.org/presentationml/2006/main">
   <p:cSld>
     <p:spTree>
@@ -8624,7 +7164,7 @@
           <p:nvPr>
             <p:extLst>
               <p:ext uri="{D42A27DB-BD31-4B8C-83A1-F6EECF244321}">
-                <p14:modId xmlns:p14="http://schemas.microsoft.com/office/powerpoint/2010/main" val="1863880455"/>
+                <p14:modId xmlns:p14="http://schemas.microsoft.com/office/powerpoint/2010/main" val="2608192966"/>
               </p:ext>
             </p:extLst>
           </p:nvPr>
@@ -9123,75 +7663,7 @@
                             <a:srgbClr val="000000"/>
                           </a:solidFill>
                         </a:rPr>
-                        <a:t>428.90</a:t>
-                      </a:r>
-                    </a:p>
-                  </a:txBody>
-                  <a:tcPr>
-                    <a:lnT w="38100" cmpd="sng">
-                      <a:noFill/>
-                    </a:lnT>
-                    <a:lnB w="12700" cap="flat" cmpd="sng" algn="ctr">
-                      <a:solidFill>
-                        <a:schemeClr val="tx1"/>
-                      </a:solidFill>
-                      <a:prstDash val="solid"/>
-                      <a:round/>
-                      <a:headEnd type="none" w="med" len="med"/>
-                      <a:tailEnd type="none" w="med" len="med"/>
-                    </a:lnB>
-                    <a:solidFill>
-                      <a:schemeClr val="bg1"/>
-                    </a:solidFill>
-                  </a:tcPr>
-                </a:tc>
-                <a:tc>
-                  <a:txBody>
-                    <a:bodyPr/>
-                    <a:lstStyle/>
-                    <a:p>
-                      <a:pPr algn="ctr"/>
-                      <a:r>
-                        <a:rPr lang="en-US" sz="1200" b="1">
-                          <a:solidFill>
-                            <a:srgbClr val="000000"/>
-                          </a:solidFill>
-                        </a:rPr>
-                        <a:t>0.0560</a:t>
-                      </a:r>
-                    </a:p>
-                  </a:txBody>
-                  <a:tcPr>
-                    <a:lnT w="38100" cmpd="sng">
-                      <a:noFill/>
-                    </a:lnT>
-                    <a:lnB w="12700" cap="flat" cmpd="sng" algn="ctr">
-                      <a:solidFill>
-                        <a:schemeClr val="tx1"/>
-                      </a:solidFill>
-                      <a:prstDash val="solid"/>
-                      <a:round/>
-                      <a:headEnd type="none" w="med" len="med"/>
-                      <a:tailEnd type="none" w="med" len="med"/>
-                    </a:lnB>
-                    <a:solidFill>
-                      <a:schemeClr val="bg1"/>
-                    </a:solidFill>
-                  </a:tcPr>
-                </a:tc>
-                <a:tc>
-                  <a:txBody>
-                    <a:bodyPr/>
-                    <a:lstStyle/>
-                    <a:p>
-                      <a:pPr algn="ctr"/>
-                      <a:r>
-                        <a:rPr lang="en-US" sz="1200" b="1">
-                          <a:solidFill>
-                            <a:srgbClr val="000000"/>
-                          </a:solidFill>
-                        </a:rPr>
-                        <a:t>0.23</a:t>
+                        <a:t>559.3714</a:t>
                       </a:r>
                     </a:p>
                   </a:txBody>
@@ -9225,7 +7697,75 @@
                             <a:srgbClr val="000000"/>
                           </a:solidFill>
                         </a:rPr>
-                        <a:t>100.0000</a:t>
+                        <a:t>0.0429</a:t>
+                      </a:r>
+                    </a:p>
+                  </a:txBody>
+                  <a:tcPr>
+                    <a:lnT w="38100" cmpd="sng">
+                      <a:noFill/>
+                    </a:lnT>
+                    <a:lnB w="12700" cap="flat" cmpd="sng" algn="ctr">
+                      <a:solidFill>
+                        <a:schemeClr val="tx1"/>
+                      </a:solidFill>
+                      <a:prstDash val="solid"/>
+                      <a:round/>
+                      <a:headEnd type="none" w="med" len="med"/>
+                      <a:tailEnd type="none" w="med" len="med"/>
+                    </a:lnB>
+                    <a:solidFill>
+                      <a:schemeClr val="bg1"/>
+                    </a:solidFill>
+                  </a:tcPr>
+                </a:tc>
+                <a:tc>
+                  <a:txBody>
+                    <a:bodyPr/>
+                    <a:lstStyle/>
+                    <a:p>
+                      <a:pPr algn="ctr"/>
+                      <a:r>
+                        <a:rPr lang="en-US" sz="1200" b="1" dirty="0">
+                          <a:solidFill>
+                            <a:srgbClr val="000000"/>
+                          </a:solidFill>
+                        </a:rPr>
+                        <a:t>1.6172</a:t>
+                      </a:r>
+                    </a:p>
+                  </a:txBody>
+                  <a:tcPr>
+                    <a:lnT w="38100" cmpd="sng">
+                      <a:noFill/>
+                    </a:lnT>
+                    <a:lnB w="12700" cap="flat" cmpd="sng" algn="ctr">
+                      <a:solidFill>
+                        <a:schemeClr val="tx1"/>
+                      </a:solidFill>
+                      <a:prstDash val="solid"/>
+                      <a:round/>
+                      <a:headEnd type="none" w="med" len="med"/>
+                      <a:tailEnd type="none" w="med" len="med"/>
+                    </a:lnB>
+                    <a:solidFill>
+                      <a:schemeClr val="bg1"/>
+                    </a:solidFill>
+                  </a:tcPr>
+                </a:tc>
+                <a:tc>
+                  <a:txBody>
+                    <a:bodyPr/>
+                    <a:lstStyle/>
+                    <a:p>
+                      <a:pPr algn="ctr"/>
+                      <a:r>
+                        <a:rPr lang="en-US" sz="1200" b="1" dirty="0">
+                          <a:solidFill>
+                            <a:srgbClr val="000000"/>
+                          </a:solidFill>
+                        </a:rPr>
+                        <a:t>60.3036</a:t>
                       </a:r>
                     </a:p>
                   </a:txBody>
@@ -9329,87 +7869,7 @@
                             <a:srgbClr val="000000"/>
                           </a:solidFill>
                         </a:rPr>
-                        <a:t>483.72</a:t>
-                      </a:r>
-                    </a:p>
-                  </a:txBody>
-                  <a:tcPr>
-                    <a:lnT w="12700" cap="flat" cmpd="sng" algn="ctr">
-                      <a:solidFill>
-                        <a:schemeClr val="tx1"/>
-                      </a:solidFill>
-                      <a:prstDash val="solid"/>
-                      <a:round/>
-                      <a:headEnd type="none" w="med" len="med"/>
-                      <a:tailEnd type="none" w="med" len="med"/>
-                    </a:lnT>
-                    <a:lnB w="12700" cap="flat" cmpd="sng" algn="ctr">
-                      <a:solidFill>
-                        <a:schemeClr val="tx1"/>
-                      </a:solidFill>
-                      <a:prstDash val="solid"/>
-                      <a:round/>
-                      <a:headEnd type="none" w="med" len="med"/>
-                      <a:tailEnd type="none" w="med" len="med"/>
-                    </a:lnB>
-                    <a:solidFill>
-                      <a:schemeClr val="bg1"/>
-                    </a:solidFill>
-                  </a:tcPr>
-                </a:tc>
-                <a:tc>
-                  <a:txBody>
-                    <a:bodyPr/>
-                    <a:lstStyle/>
-                    <a:p>
-                      <a:pPr algn="ctr"/>
-                      <a:r>
-                        <a:rPr lang="en-US" sz="1200" b="1">
-                          <a:solidFill>
-                            <a:srgbClr val="000000"/>
-                          </a:solidFill>
-                        </a:rPr>
-                        <a:t>0.0496</a:t>
-                      </a:r>
-                    </a:p>
-                  </a:txBody>
-                  <a:tcPr>
-                    <a:lnT w="12700" cap="flat" cmpd="sng" algn="ctr">
-                      <a:solidFill>
-                        <a:schemeClr val="tx1"/>
-                      </a:solidFill>
-                      <a:prstDash val="solid"/>
-                      <a:round/>
-                      <a:headEnd type="none" w="med" len="med"/>
-                      <a:tailEnd type="none" w="med" len="med"/>
-                    </a:lnT>
-                    <a:lnB w="12700" cap="flat" cmpd="sng" algn="ctr">
-                      <a:solidFill>
-                        <a:schemeClr val="tx1"/>
-                      </a:solidFill>
-                      <a:prstDash val="solid"/>
-                      <a:round/>
-                      <a:headEnd type="none" w="med" len="med"/>
-                      <a:tailEnd type="none" w="med" len="med"/>
-                    </a:lnB>
-                    <a:solidFill>
-                      <a:schemeClr val="bg1"/>
-                    </a:solidFill>
-                  </a:tcPr>
-                </a:tc>
-                <a:tc>
-                  <a:txBody>
-                    <a:bodyPr/>
-                    <a:lstStyle/>
-                    <a:p>
-                      <a:pPr algn="ctr"/>
-                      <a:r>
-                        <a:rPr lang="en-US" sz="1200" b="1">
-                          <a:solidFill>
-                            <a:srgbClr val="000000"/>
-                          </a:solidFill>
-                        </a:rPr>
-                        <a:t>0.49</a:t>
+                        <a:t>344.6937</a:t>
                       </a:r>
                     </a:p>
                   </a:txBody>
@@ -9449,7 +7909,87 @@
                             <a:srgbClr val="000000"/>
                           </a:solidFill>
                         </a:rPr>
-                        <a:t>100.0000</a:t>
+                        <a:t> 0.0209</a:t>
+                      </a:r>
+                    </a:p>
+                  </a:txBody>
+                  <a:tcPr>
+                    <a:lnT w="12700" cap="flat" cmpd="sng" algn="ctr">
+                      <a:solidFill>
+                        <a:schemeClr val="tx1"/>
+                      </a:solidFill>
+                      <a:prstDash val="solid"/>
+                      <a:round/>
+                      <a:headEnd type="none" w="med" len="med"/>
+                      <a:tailEnd type="none" w="med" len="med"/>
+                    </a:lnT>
+                    <a:lnB w="12700" cap="flat" cmpd="sng" algn="ctr">
+                      <a:solidFill>
+                        <a:schemeClr val="tx1"/>
+                      </a:solidFill>
+                      <a:prstDash val="solid"/>
+                      <a:round/>
+                      <a:headEnd type="none" w="med" len="med"/>
+                      <a:tailEnd type="none" w="med" len="med"/>
+                    </a:lnB>
+                    <a:solidFill>
+                      <a:schemeClr val="bg1"/>
+                    </a:solidFill>
+                  </a:tcPr>
+                </a:tc>
+                <a:tc>
+                  <a:txBody>
+                    <a:bodyPr/>
+                    <a:lstStyle/>
+                    <a:p>
+                      <a:pPr algn="ctr"/>
+                      <a:r>
+                        <a:rPr lang="en-US" sz="1200" b="1" dirty="0">
+                          <a:solidFill>
+                            <a:srgbClr val="000000"/>
+                          </a:solidFill>
+                        </a:rPr>
+                        <a:t>2.2034</a:t>
+                      </a:r>
+                    </a:p>
+                  </a:txBody>
+                  <a:tcPr>
+                    <a:lnT w="12700" cap="flat" cmpd="sng" algn="ctr">
+                      <a:solidFill>
+                        <a:schemeClr val="tx1"/>
+                      </a:solidFill>
+                      <a:prstDash val="solid"/>
+                      <a:round/>
+                      <a:headEnd type="none" w="med" len="med"/>
+                      <a:tailEnd type="none" w="med" len="med"/>
+                    </a:lnT>
+                    <a:lnB w="12700" cap="flat" cmpd="sng" algn="ctr">
+                      <a:solidFill>
+                        <a:schemeClr val="tx1"/>
+                      </a:solidFill>
+                      <a:prstDash val="solid"/>
+                      <a:round/>
+                      <a:headEnd type="none" w="med" len="med"/>
+                      <a:tailEnd type="none" w="med" len="med"/>
+                    </a:lnB>
+                    <a:solidFill>
+                      <a:schemeClr val="bg1"/>
+                    </a:solidFill>
+                  </a:tcPr>
+                </a:tc>
+                <a:tc>
+                  <a:txBody>
+                    <a:bodyPr/>
+                    <a:lstStyle/>
+                    <a:p>
+                      <a:pPr algn="ctr"/>
+                      <a:r>
+                        <a:rPr lang="en-US" sz="1200" b="1" dirty="0">
+                          <a:solidFill>
+                            <a:srgbClr val="000000"/>
+                          </a:solidFill>
+                        </a:rPr>
+                        <a:t>1.4455</a:t>
                       </a:r>
                     </a:p>
                   </a:txBody>
@@ -9559,7 +8099,7 @@
                             <a:srgbClr val="000000"/>
                           </a:solidFill>
                         </a:rPr>
-                        <a:t>451.62</a:t>
+                        <a:t>415.9288</a:t>
                       </a:r>
                     </a:p>
                   </a:txBody>
@@ -9599,47 +8139,7 @@
                             <a:srgbClr val="000000"/>
                           </a:solidFill>
                         </a:rPr>
-                        <a:t>0.0531</a:t>
-                      </a:r>
-                    </a:p>
-                  </a:txBody>
-                  <a:tcPr>
-                    <a:lnT w="12700" cap="flat" cmpd="sng" algn="ctr">
-                      <a:solidFill>
-                        <a:schemeClr val="tx1"/>
-                      </a:solidFill>
-                      <a:prstDash val="solid"/>
-                      <a:round/>
-                      <a:headEnd type="none" w="med" len="med"/>
-                      <a:tailEnd type="none" w="med" len="med"/>
-                    </a:lnT>
-                    <a:lnB w="12700" cap="flat" cmpd="sng" algn="ctr">
-                      <a:solidFill>
-                        <a:schemeClr val="tx1"/>
-                      </a:solidFill>
-                      <a:prstDash val="solid"/>
-                      <a:round/>
-                      <a:headEnd type="none" w="med" len="med"/>
-                      <a:tailEnd type="none" w="med" len="med"/>
-                    </a:lnB>
-                    <a:solidFill>
-                      <a:schemeClr val="bg1"/>
-                    </a:solidFill>
-                  </a:tcPr>
-                </a:tc>
-                <a:tc>
-                  <a:txBody>
-                    <a:bodyPr/>
-                    <a:lstStyle/>
-                    <a:p>
-                      <a:pPr algn="ctr"/>
-                      <a:r>
-                        <a:rPr lang="en-US" sz="1200" b="1">
-                          <a:solidFill>
-                            <a:srgbClr val="000000"/>
-                          </a:solidFill>
-                        </a:rPr>
-                        <a:t>0.06</a:t>
+                        <a:t>0.1155</a:t>
                       </a:r>
                     </a:p>
                   </a:txBody>
@@ -9679,7 +8179,47 @@
                             <a:srgbClr val="000000"/>
                           </a:solidFill>
                         </a:rPr>
-                        <a:t>100.0000</a:t>
+                        <a:t>11.7710</a:t>
+                      </a:r>
+                    </a:p>
+                  </a:txBody>
+                  <a:tcPr>
+                    <a:lnT w="12700" cap="flat" cmpd="sng" algn="ctr">
+                      <a:solidFill>
+                        <a:schemeClr val="tx1"/>
+                      </a:solidFill>
+                      <a:prstDash val="solid"/>
+                      <a:round/>
+                      <a:headEnd type="none" w="med" len="med"/>
+                      <a:tailEnd type="none" w="med" len="med"/>
+                    </a:lnT>
+                    <a:lnB w="12700" cap="flat" cmpd="sng" algn="ctr">
+                      <a:solidFill>
+                        <a:schemeClr val="tx1"/>
+                      </a:solidFill>
+                      <a:prstDash val="solid"/>
+                      <a:round/>
+                      <a:headEnd type="none" w="med" len="med"/>
+                      <a:tailEnd type="none" w="med" len="med"/>
+                    </a:lnB>
+                    <a:solidFill>
+                      <a:schemeClr val="bg1"/>
+                    </a:solidFill>
+                  </a:tcPr>
+                </a:tc>
+                <a:tc>
+                  <a:txBody>
+                    <a:bodyPr/>
+                    <a:lstStyle/>
+                    <a:p>
+                      <a:pPr algn="ctr"/>
+                      <a:r>
+                        <a:rPr lang="en-US" sz="1200" b="1" dirty="0">
+                          <a:solidFill>
+                            <a:srgbClr val="000000"/>
+                          </a:solidFill>
+                        </a:rPr>
+                        <a:t>31.7038</a:t>
                       </a:r>
                     </a:p>
                   </a:txBody>
@@ -9854,13 +8394,14 @@
                     <a:p>
                       <a:pPr algn="ctr"/>
                       <a:r>
-                        <a:rPr lang="en-US" sz="1200" b="1" dirty="0">
-                          <a:solidFill>
-                            <a:srgbClr val="000000"/>
-                          </a:solidFill>
-                        </a:rPr>
-                        <a:t>428.90</a:t>
+                        <a:rPr lang="en-US" sz="1200" b="1" dirty="0"/>
+                        <a:t>454.9465</a:t>
                       </a:r>
+                      <a:endParaRPr lang="en-US" sz="1200" b="1" dirty="0">
+                        <a:solidFill>
+                          <a:srgbClr val="000000"/>
+                        </a:solidFill>
+                      </a:endParaRPr>
                     </a:p>
                   </a:txBody>
                   <a:tcPr>
@@ -9894,13 +8435,14 @@
                     <a:p>
                       <a:pPr algn="ctr"/>
                       <a:r>
-                        <a:rPr lang="en-US" sz="1200" b="1" dirty="0">
-                          <a:solidFill>
-                            <a:srgbClr val="000000"/>
-                          </a:solidFill>
-                        </a:rPr>
-                        <a:t>0.0560</a:t>
+                        <a:rPr lang="en-US" sz="1200" b="1" dirty="0"/>
+                        <a:t>0.0528</a:t>
                       </a:r>
+                      <a:endParaRPr lang="en-US" sz="1200" b="1" dirty="0">
+                        <a:solidFill>
+                          <a:srgbClr val="000000"/>
+                        </a:solidFill>
+                      </a:endParaRPr>
                     </a:p>
                   </a:txBody>
                   <a:tcPr>
@@ -9934,13 +8476,14 @@
                     <a:p>
                       <a:pPr algn="ctr"/>
                       <a:r>
-                        <a:rPr lang="en-US" sz="1200" b="1">
-                          <a:solidFill>
-                            <a:srgbClr val="000000"/>
-                          </a:solidFill>
-                        </a:rPr>
-                        <a:t>0.23</a:t>
+                        <a:rPr lang="en-US" sz="1200" b="1" dirty="0"/>
+                        <a:t>5.1339</a:t>
                       </a:r>
+                      <a:endParaRPr lang="en-US" sz="1200" b="1" dirty="0">
+                        <a:solidFill>
+                          <a:srgbClr val="000000"/>
+                        </a:solidFill>
+                      </a:endParaRPr>
                     </a:p>
                   </a:txBody>
                   <a:tcPr>
@@ -9974,13 +8517,14 @@
                     <a:p>
                       <a:pPr algn="ctr"/>
                       <a:r>
-                        <a:rPr lang="en-US" sz="1200" b="1" dirty="0">
-                          <a:solidFill>
-                            <a:srgbClr val="000000"/>
-                          </a:solidFill>
-                        </a:rPr>
-                        <a:t>100.0000</a:t>
+                        <a:rPr lang="en-US" sz="1200" b="1" dirty="0"/>
+                        <a:t>2.0864</a:t>
                       </a:r>
+                      <a:endParaRPr lang="en-US" sz="1200" b="1" dirty="0">
+                        <a:solidFill>
+                          <a:srgbClr val="000000"/>
+                        </a:solidFill>
+                      </a:endParaRPr>
                     </a:p>
                   </a:txBody>
                   <a:tcPr>
@@ -10084,13 +8628,14 @@
                     <a:p>
                       <a:pPr algn="ctr"/>
                       <a:r>
-                        <a:rPr lang="en-US" sz="1200" b="1" dirty="0">
-                          <a:solidFill>
-                            <a:srgbClr val="000000"/>
-                          </a:solidFill>
-                        </a:rPr>
-                        <a:t>483.72</a:t>
+                        <a:rPr lang="en-US" sz="1200" b="1" dirty="0"/>
+                        <a:t> 206.6346</a:t>
                       </a:r>
+                      <a:endParaRPr lang="en-US" sz="1200" b="1" dirty="0">
+                        <a:solidFill>
+                          <a:srgbClr val="000000"/>
+                        </a:solidFill>
+                      </a:endParaRPr>
                     </a:p>
                   </a:txBody>
                   <a:tcPr>
@@ -10124,13 +8669,14 @@
                     <a:p>
                       <a:pPr algn="ctr"/>
                       <a:r>
-                        <a:rPr lang="en-US" sz="1200" b="1" dirty="0">
-                          <a:solidFill>
-                            <a:srgbClr val="000000"/>
-                          </a:solidFill>
-                        </a:rPr>
-                        <a:t>0.0496</a:t>
+                        <a:rPr lang="en-US" sz="1200" b="1" dirty="0"/>
+                        <a:t>0.0349</a:t>
                       </a:r>
+                      <a:endParaRPr lang="en-US" sz="1200" b="1" dirty="0">
+                        <a:solidFill>
+                          <a:srgbClr val="000000"/>
+                        </a:solidFill>
+                      </a:endParaRPr>
                     </a:p>
                   </a:txBody>
                   <a:tcPr>
@@ -10164,13 +8710,14 @@
                     <a:p>
                       <a:pPr algn="ctr"/>
                       <a:r>
-                        <a:rPr lang="en-US" sz="1200" b="1" dirty="0">
-                          <a:solidFill>
-                            <a:srgbClr val="000000"/>
-                          </a:solidFill>
-                        </a:rPr>
-                        <a:t>0.49</a:t>
+                        <a:rPr lang="en-US" sz="1200" b="1" dirty="0"/>
+                        <a:t>2.2034</a:t>
                       </a:r>
+                      <a:endParaRPr lang="en-US" sz="1200" b="1" dirty="0">
+                        <a:solidFill>
+                          <a:srgbClr val="000000"/>
+                        </a:solidFill>
+                      </a:endParaRPr>
                     </a:p>
                   </a:txBody>
                   <a:tcPr>
@@ -10204,13 +8751,14 @@
                     <a:p>
                       <a:pPr algn="ctr"/>
                       <a:r>
-                        <a:rPr lang="en-US" sz="1200" b="1" dirty="0">
-                          <a:solidFill>
-                            <a:srgbClr val="000000"/>
-                          </a:solidFill>
-                        </a:rPr>
-                        <a:t>100.0000</a:t>
+                        <a:rPr lang="en-US" sz="1200" b="1" dirty="0"/>
+                        <a:t>1.4455</a:t>
                       </a:r>
+                      <a:endParaRPr lang="en-US" sz="1200" b="1" dirty="0">
+                        <a:solidFill>
+                          <a:srgbClr val="000000"/>
+                        </a:solidFill>
+                      </a:endParaRPr>
                     </a:p>
                   </a:txBody>
                   <a:tcPr>
@@ -10319,7 +8867,7 @@
                             <a:srgbClr val="000000"/>
                           </a:solidFill>
                         </a:rPr>
-                        <a:t>451.62</a:t>
+                        <a:t>209.5738</a:t>
                       </a:r>
                     </a:p>
                   </a:txBody>
@@ -10354,13 +8902,14 @@
                     <a:p>
                       <a:pPr algn="ctr"/>
                       <a:r>
-                        <a:rPr lang="en-US" sz="1200" b="1" dirty="0">
-                          <a:solidFill>
-                            <a:srgbClr val="000000"/>
-                          </a:solidFill>
-                        </a:rPr>
-                        <a:t>0.0531</a:t>
+                        <a:rPr lang="en-US" sz="1200" b="1" dirty="0"/>
+                        <a:t>0.2296</a:t>
                       </a:r>
+                      <a:endParaRPr lang="en-US" sz="1200" b="1" dirty="0">
+                        <a:solidFill>
+                          <a:srgbClr val="000000"/>
+                        </a:solidFill>
+                      </a:endParaRPr>
                     </a:p>
                   </a:txBody>
                   <a:tcPr>
@@ -10394,13 +8943,14 @@
                     <a:p>
                       <a:pPr algn="ctr"/>
                       <a:r>
-                        <a:rPr lang="en-US" sz="1200" b="1" dirty="0">
-                          <a:solidFill>
-                            <a:srgbClr val="000000"/>
-                          </a:solidFill>
-                        </a:rPr>
-                        <a:t>0.06</a:t>
+                        <a:rPr lang="en-US" sz="1200" b="1" dirty="0"/>
+                        <a:t>12.9685</a:t>
                       </a:r>
+                      <a:endParaRPr lang="en-US" sz="1200" b="1" dirty="0">
+                        <a:solidFill>
+                          <a:srgbClr val="000000"/>
+                        </a:solidFill>
+                      </a:endParaRPr>
                     </a:p>
                   </a:txBody>
                   <a:tcPr>
@@ -10434,13 +8984,14 @@
                     <a:p>
                       <a:pPr algn="ctr"/>
                       <a:r>
-                        <a:rPr lang="en-US" sz="1200" b="1" dirty="0">
-                          <a:solidFill>
-                            <a:srgbClr val="000000"/>
-                          </a:solidFill>
-                        </a:rPr>
-                        <a:t>100.0000</a:t>
+                        <a:rPr lang="en-US" sz="1200" b="1" dirty="0"/>
+                        <a:t>2.6128</a:t>
                       </a:r>
+                      <a:endParaRPr lang="en-US" sz="1200" b="1" dirty="0">
+                        <a:solidFill>
+                          <a:srgbClr val="000000"/>
+                        </a:solidFill>
+                      </a:endParaRPr>
                     </a:p>
                   </a:txBody>
                   <a:tcPr>
@@ -10554,7 +9105,7 @@
                     <a:p>
                       <a:pPr algn="ctr"/>
                       <a:r>
-                        <a:rPr lang="en-US" sz="1200" b="1">
+                        <a:rPr lang="en-US" sz="1200" b="1" dirty="0">
                           <a:solidFill>
                             <a:srgbClr val="000000"/>
                           </a:solidFill>
@@ -10603,13 +9154,14 @@
                     <a:p>
                       <a:pPr algn="ctr"/>
                       <a:r>
-                        <a:rPr lang="en-US" sz="1200" b="1" dirty="0">
-                          <a:solidFill>
-                            <a:srgbClr val="000000"/>
-                          </a:solidFill>
-                        </a:rPr>
-                        <a:t>428.90</a:t>
+                        <a:rPr lang="en-US" sz="1200" b="1" dirty="0"/>
+                        <a:t>523.1036</a:t>
                       </a:r>
+                      <a:endParaRPr lang="en-US" sz="1200" b="1" dirty="0">
+                        <a:solidFill>
+                          <a:srgbClr val="000000"/>
+                        </a:solidFill>
+                      </a:endParaRPr>
                     </a:p>
                   </a:txBody>
                   <a:tcPr>
@@ -10643,13 +9195,14 @@
                     <a:p>
                       <a:pPr algn="ctr"/>
                       <a:r>
-                        <a:rPr lang="en-US" sz="1200" b="1" dirty="0">
-                          <a:solidFill>
-                            <a:srgbClr val="000000"/>
-                          </a:solidFill>
-                        </a:rPr>
-                        <a:t>0.0560</a:t>
+                        <a:rPr lang="en-US" sz="1200" b="1" dirty="0"/>
+                        <a:t>0.0459</a:t>
                       </a:r>
+                      <a:endParaRPr lang="en-US" sz="1200" b="1" dirty="0">
+                        <a:solidFill>
+                          <a:srgbClr val="000000"/>
+                        </a:solidFill>
+                      </a:endParaRPr>
                     </a:p>
                   </a:txBody>
                   <a:tcPr>
@@ -10683,13 +9236,14 @@
                     <a:p>
                       <a:pPr algn="ctr"/>
                       <a:r>
-                        <a:rPr lang="en-US" sz="1200" b="1" dirty="0">
-                          <a:solidFill>
-                            <a:srgbClr val="000000"/>
-                          </a:solidFill>
-                        </a:rPr>
-                        <a:t>0.23</a:t>
+                        <a:rPr lang="en-US" sz="1200" b="1" dirty="0"/>
+                        <a:t>1.6172</a:t>
                       </a:r>
+                      <a:endParaRPr lang="en-US" sz="1200" b="1" dirty="0">
+                        <a:solidFill>
+                          <a:srgbClr val="000000"/>
+                        </a:solidFill>
+                      </a:endParaRPr>
                     </a:p>
                   </a:txBody>
                   <a:tcPr>
@@ -10723,13 +9277,14 @@
                     <a:p>
                       <a:pPr algn="ctr"/>
                       <a:r>
-                        <a:rPr lang="en-US" sz="1200" b="1" dirty="0">
-                          <a:solidFill>
-                            <a:srgbClr val="000000"/>
-                          </a:solidFill>
-                        </a:rPr>
-                        <a:t>100.0000</a:t>
+                        <a:rPr lang="en-US" sz="1200" b="1" dirty="0"/>
+                        <a:t>60.3036</a:t>
                       </a:r>
+                      <a:endParaRPr lang="en-US" sz="1200" b="1" dirty="0">
+                        <a:solidFill>
+                          <a:srgbClr val="000000"/>
+                        </a:solidFill>
+                      </a:endParaRPr>
                     </a:p>
                   </a:txBody>
                   <a:tcPr>
@@ -10833,13 +9388,14 @@
                     <a:p>
                       <a:pPr algn="ctr"/>
                       <a:r>
-                        <a:rPr lang="en-US" sz="1200" b="1" dirty="0">
-                          <a:solidFill>
-                            <a:srgbClr val="000000"/>
-                          </a:solidFill>
-                        </a:rPr>
-                        <a:t>483.72</a:t>
+                        <a:rPr lang="en-US" sz="1200" b="1" dirty="0"/>
+                        <a:t>344.6937</a:t>
                       </a:r>
+                      <a:endParaRPr lang="en-US" sz="1200" b="1" dirty="0">
+                        <a:solidFill>
+                          <a:srgbClr val="000000"/>
+                        </a:solidFill>
+                      </a:endParaRPr>
                     </a:p>
                   </a:txBody>
                   <a:tcPr>
@@ -10873,13 +9429,14 @@
                     <a:p>
                       <a:pPr algn="ctr"/>
                       <a:r>
-                        <a:rPr lang="en-US" sz="1200" b="1" dirty="0">
-                          <a:solidFill>
-                            <a:srgbClr val="000000"/>
-                          </a:solidFill>
-                        </a:rPr>
-                        <a:t>0.0496</a:t>
+                        <a:rPr lang="en-US" sz="1200" b="1" dirty="0"/>
+                        <a:t>0.0209</a:t>
                       </a:r>
+                      <a:endParaRPr lang="en-US" sz="1200" b="1" dirty="0">
+                        <a:solidFill>
+                          <a:srgbClr val="000000"/>
+                        </a:solidFill>
+                      </a:endParaRPr>
                     </a:p>
                   </a:txBody>
                   <a:tcPr>
@@ -10913,13 +9470,14 @@
                     <a:p>
                       <a:pPr algn="ctr"/>
                       <a:r>
-                        <a:rPr lang="en-US" sz="1200" b="1" dirty="0">
-                          <a:solidFill>
-                            <a:srgbClr val="000000"/>
-                          </a:solidFill>
-                        </a:rPr>
-                        <a:t>24.25</a:t>
+                        <a:rPr lang="en-US" sz="1200" b="1" dirty="0"/>
+                        <a:t>59.0540</a:t>
                       </a:r>
+                      <a:endParaRPr lang="en-US" sz="1200" b="1" dirty="0">
+                        <a:solidFill>
+                          <a:srgbClr val="000000"/>
+                        </a:solidFill>
+                      </a:endParaRPr>
                     </a:p>
                   </a:txBody>
                   <a:tcPr>
@@ -10953,13 +9511,14 @@
                     <a:p>
                       <a:pPr algn="ctr"/>
                       <a:r>
-                        <a:rPr lang="en-US" sz="1200" b="1" dirty="0">
-                          <a:solidFill>
-                            <a:srgbClr val="000000"/>
-                          </a:solidFill>
-                        </a:rPr>
-                        <a:t>100.0000</a:t>
+                        <a:rPr lang="en-US" sz="1200" b="1" dirty="0"/>
+                        <a:t>48.8602</a:t>
                       </a:r>
+                      <a:endParaRPr lang="en-US" sz="1200" b="1" dirty="0">
+                        <a:solidFill>
+                          <a:srgbClr val="000000"/>
+                        </a:solidFill>
+                      </a:endParaRPr>
                     </a:p>
                   </a:txBody>
                   <a:tcPr>
@@ -11063,13 +9622,14 @@
                     <a:p>
                       <a:pPr algn="ctr"/>
                       <a:r>
-                        <a:rPr lang="en-US" sz="1200" b="1">
-                          <a:solidFill>
-                            <a:srgbClr val="000000"/>
-                          </a:solidFill>
-                        </a:rPr>
-                        <a:t>451.62</a:t>
+                        <a:rPr lang="en-US" sz="1200" b="1" dirty="0"/>
+                        <a:t>415.9288</a:t>
                       </a:r>
+                      <a:endParaRPr lang="en-US" sz="1200" b="1" dirty="0">
+                        <a:solidFill>
+                          <a:srgbClr val="000000"/>
+                        </a:solidFill>
+                      </a:endParaRPr>
                     </a:p>
                   </a:txBody>
                   <a:tcPr>
@@ -11103,13 +9663,14 @@
                     <a:p>
                       <a:pPr algn="ctr"/>
                       <a:r>
-                        <a:rPr lang="en-US" sz="1200" b="1">
-                          <a:solidFill>
-                            <a:srgbClr val="000000"/>
-                          </a:solidFill>
-                        </a:rPr>
-                        <a:t>0.0531</a:t>
+                        <a:rPr lang="en-US" sz="1200" b="1" dirty="0"/>
+                        <a:t>0.1156</a:t>
                       </a:r>
+                      <a:endParaRPr lang="en-US" sz="1200" b="1" dirty="0">
+                        <a:solidFill>
+                          <a:srgbClr val="000000"/>
+                        </a:solidFill>
+                      </a:endParaRPr>
                     </a:p>
                   </a:txBody>
                   <a:tcPr>
@@ -11143,13 +9704,14 @@
                     <a:p>
                       <a:pPr algn="ctr"/>
                       <a:r>
-                        <a:rPr lang="en-US" sz="1200" b="1" dirty="0">
-                          <a:solidFill>
-                            <a:srgbClr val="000000"/>
-                          </a:solidFill>
-                        </a:rPr>
-                        <a:t>0.06</a:t>
+                        <a:rPr lang="en-US" sz="1200" b="1" dirty="0"/>
+                        <a:t>0.7999</a:t>
                       </a:r>
+                      <a:endParaRPr lang="en-US" sz="1200" b="1" dirty="0">
+                        <a:solidFill>
+                          <a:srgbClr val="000000"/>
+                        </a:solidFill>
+                      </a:endParaRPr>
                     </a:p>
                   </a:txBody>
                   <a:tcPr>
@@ -11183,13 +9745,14 @@
                     <a:p>
                       <a:pPr algn="ctr"/>
                       <a:r>
-                        <a:rPr lang="en-US" sz="1200" b="1" dirty="0">
-                          <a:solidFill>
-                            <a:srgbClr val="000000"/>
-                          </a:solidFill>
-                        </a:rPr>
-                        <a:t>100.0000</a:t>
+                        <a:rPr lang="en-US" sz="1200" b="1" dirty="0"/>
+                        <a:t>12.8241</a:t>
                       </a:r>
+                      <a:endParaRPr lang="en-US" sz="1200" b="1" dirty="0">
+                        <a:solidFill>
+                          <a:srgbClr val="000000"/>
+                        </a:solidFill>
+                      </a:endParaRPr>
                     </a:p>
                   </a:txBody>
                   <a:tcPr>
@@ -11558,7 +10121,7 @@
           <a:p>
             <a:fld id="{00A14CD1-B2ED-44D0-9C35-0F6E1DE20A5F}" type="slidenum">
               <a:rPr lang="en-US" smtClean="0"/>
-              <a:t>6</a:t>
+              <a:t>5</a:t>
             </a:fld>
             <a:endParaRPr lang="en-US"/>
           </a:p>
@@ -11624,7 +10187,7 @@
 </p:sld>
 </file>
 
-<file path=ppt/slides/slide7.xml><?xml version="1.0" encoding="utf-8"?>
+<file path=ppt/slides/slide6.xml><?xml version="1.0" encoding="utf-8"?>
 <p:sld xmlns:a="http://schemas.openxmlformats.org/drawingml/2006/main" xmlns:r="http://schemas.openxmlformats.org/officeDocument/2006/relationships" xmlns:p="http://schemas.openxmlformats.org/presentationml/2006/main">
   <p:cSld>
     <p:spTree>
@@ -11777,7 +10340,7 @@
           <a:p>
             <a:fld id="{00A14CD1-B2ED-44D0-9C35-0F6E1DE20A5F}" type="slidenum">
               <a:rPr lang="en-US" smtClean="0"/>
-              <a:t>7</a:t>
+              <a:t>6</a:t>
             </a:fld>
             <a:endParaRPr lang="en-US"/>
           </a:p>
